--- a/slides/exact/exact_slides_cns.pptx
+++ b/slides/exact/exact_slides_cns.pptx
@@ -523,7 +523,7 @@
           <a:lstStyle/>
           <a:p>
             <a:r>
-              <a:t>Counting from C2 or the sacrum is how we name a level, and in the room the end we count from is often out of the picture. So the question is narrow: from the bodies we can see, and their measurements alone, can we say which levels they are? Each body gives seven measures a segmentation reads: the widths and depths of its upper and lower end plates, its posterior height, and the canal's width and depth. Everything here is synthetic: 2,000 columns drawn from Panjabi's published morphometry, so the answer is about the anatomy those tables describe, not yet about our patients.</a:t>
+              <a:t>Counting from C2 or the sacrum is how we name a level, and in the operating room the end we count from is often out of the picture. So the question is narrow: from the bodies we can see, and seven standard measures of each body, can we say which levels they are? Everything here is synthetic: 2,000 columns drawn from Panjabi's published morphometry, so every answer is about the anatomy those tables describe, not yet about our patients.</a:t>
             </a:r>
           </a:p>
         </p:txBody>
@@ -593,7 +593,7 @@
           <a:lstStyle/>
           <a:p>
             <a:r>
-              <a:t>The method is the oldest rule in probability. Before looking, every level is equally likely, the grey row. Each candidate placement of the bodies predicts what their measurements should be; Bayes' rule weighs the placements by how well they predict what we measured. One body leaves the answer spread over the mid-thoracic spine; three bodies concentrate it on the true level; nine settle it. Nothing is trained, so no other formula or network on these measures can do better on average.</a:t>
+              <a:t>Before looking, every level is equally likely. Take the synthetic fields centred on T12. From one body the answer spreads over the levels around the thoracolumbar junction, T11 to L2 on average, and T12 is named exactly in 39% of these synthetic fields; from three bodies, 73%; from nine, 95%. The figure shows one typical synthetic column. The rule is exact for the anatomy the tables describe, so no formula or network on these measures names more synthetic fields correctly on average.</a:t>
             </a:r>
           </a:p>
         </p:txBody>
@@ -663,7 +663,7 @@
           <a:lstStyle/>
           <a:p>
             <a:r>
-              <a:t>With one body in view the rule names 47% of fields exactly; with three, 73%; with nine, 96%. A trained classifier on the same measures reaches 58% from three. More useful at the table: the rule says how sure it is, and it is honest. When it says 99 per cent, it is right 99.8% of the time: 15 wrong of 6,848. When it is not sure, it says so, and we count.</a:t>
+              <a:t>On synthetic columns drawn from the tables, with one body in view the rule names 47% of fields exactly; with three, 73%; with nine, 96%. On the same synthetic measures a linear classifier reaches 58.2% from three bodies and a fitted network 71.6%. The rule also says how sure it is. On these synthetic columns, when it says 99 per cent it is right 99.8% of the time, 15 wrong of 6,848 names, and it gives a name for 17% of three-body fields; for the rest it says it is not sure.</a:t>
             </a:r>
           </a:p>
         </p:txBody>
@@ -733,7 +733,7 @@
           <a:lstStyle/>
           <a:p>
             <a:r>
-              <a:t>Short of a name, what can one body say for certain? Two things. Its region, cervical, thoracic or lumbar, for 61% of bodies, wrong 21 times in 26,786. And which side of the cervicothoracic junction it is on: near C7/T1 a single body says so 56% of the time, right 99.84%. The thoracolumbar junction is the hard one: a single body near T12/L1 commits only 7% of the time and is right 97.9%, which is not good enough to act on. Nine bodies say it for 88%.</a:t>
+              <a:t>Short of a name, what can one body say for certain? On the synthetic columns, two things. Its region, cervical, thoracic or lumbar, for 61% of single synthetic bodies, wrong 21 times in 26,786. And which side of the cervicothoracic junction it is on: near C7/T1 a single synthetic body says so 56% of the time, right 99.8%. Over all synthetic fields, a claim made at 99% confidence is right at least 99% of the time; at T12/L1, 99.96%. Near the thoracolumbar junction a single synthetic body commits only 7% of the time and is right 97.9%, too weak to rely on even in this synthetic setting. Nine bodies say which side for 88% of synthetic fields whose middle body is T11 to L1.</a:t>
             </a:r>
           </a:p>
         </p:txBody>
@@ -803,7 +803,7 @@
           <a:lstStyle/>
           <a:p>
             <a:r>
-              <a:t>Where can this go wrong? Not in the arithmetic: it is exact for the anatomy it assumes. The weak point is the anatomy table itself. Panjabi measured 12 spines; a rule built on a table that small, scored on spines that differ from it, is right 95.5% of the time when it says 99, not 99. Widening its spreads honestly restores 99.3% but it then commits on 5.5% of fields, and lumbar names are right 96.7%. So the next step is a table measured on full-spine CTs, counted from C2, with the anomalous spines in it.</a:t>
+              <a:t>Where can this go wrong? Not in the arithmetic: it is exact for the anatomy it assumes. The weak point is the anatomy table itself. Panjabi measured 12 spines; a rule built on a table that small, scored on synthetic spines drawn from a different table, is right 95.5% of the time when it says 99, not 99. A corrected rule, its one setting chosen on a separate pilot, is right 99.3% on those synthetic spines, but it then names only 5.5% of synthetic fields, and its lumbar names are right 96.7%. So the next step is to test the rule on real full-spine CT.</a:t>
             </a:r>
           </a:p>
         </p:txBody>
@@ -2269,7 +2269,7 @@
       </p:sp>
       <p:pic>
         <p:nvPicPr>
-          <p:cNvPr id="3" name="Figure: exact_slide_view" descr="A field of view: three consecutive vertebral bodies seen, the rest of the column unseen, and no C2 or sacrum to count from. Bodies drawn to Panjabi's mean upper end-plate width, canal width hatched, C3 to L5, the tables' range."/>
+          <p:cNvPr id="3" name="Figure: exact_slide_view" descr="A field of view: three consecutive vertebral bodies seen, the rest of the column unseen, and no C2 or sacrum to count from. Bodies drawn to Panjabi's mean upper end-plate width, C3 to L5, the tables' range."/>
           <p:cNvPicPr>
             <a:picLocks noChangeAspect="1"/>
           </p:cNvPicPr>
@@ -2284,7 +2284,7 @@
         <p:spPr>
           <a:xfrm>
             <a:off x="1750161" y="1325880"/>
-            <a:ext cx="1924536" cy="4434800"/>
+            <a:ext cx="1920240" cy="4434840"/>
           </a:xfrm>
           <a:prstGeom prst="rect">
             <a:avLst/>
@@ -2308,7 +2308,7 @@
         <p:spPr>
           <a:xfrm>
             <a:off x="3758373" y="1417320"/>
-            <a:ext cx="3179669" cy="4267450"/>
+            <a:ext cx="3182112" cy="4270248"/>
           </a:xfrm>
           <a:prstGeom prst="rect">
             <a:avLst/>
@@ -2324,7 +2324,7 @@
         <p:spPr>
           <a:xfrm>
             <a:off x="7147232" y="1325880"/>
-            <a:ext cx="4752769" cy="566928"/>
+            <a:ext cx="4752769" cy="777240"/>
           </a:xfrm>
           <a:prstGeom prst="rect">
             <a:avLst/>
@@ -2343,7 +2343,7 @@
               </a:spcAft>
             </a:pPr>
             <a:r>
-              <a:rPr sz="1200" b="1" i="0">
+              <a:rPr sz="1400" b="1" i="0">
                 <a:solidFill>
                   <a:srgbClr val="595959"/>
                 </a:solidFill>
@@ -2359,13 +2359,23 @@
               </a:spcAft>
             </a:pPr>
             <a:r>
-              <a:rPr sz="1200" b="0" i="0">
+              <a:rPr sz="1400" b="0" i="0">
                 <a:solidFill>
                   <a:srgbClr val="595959"/>
                 </a:solidFill>
                 <a:latin typeface="Cambria"/>
               </a:rPr>
-              <a:t>General Surgery, Wayne State University School of Medicine / Detroit Medical Center</a:t>
+              <a:t>General Surgery (Wayne State University School of Medicine /</a:t>
+            </a:r>
+            <a:br/>
+            <a:r>
+              <a:rPr sz="1400" b="0" i="0">
+                <a:solidFill>
+                  <a:srgbClr val="595959"/>
+                </a:solidFill>
+                <a:latin typeface="Cambria"/>
+              </a:rPr>
+              <a:t>Detroit Medical Center)</a:t>
             </a:r>
           </a:p>
         </p:txBody>
@@ -2378,8 +2388,8 @@
         </p:nvSpPr>
         <p:spPr>
           <a:xfrm>
-            <a:off x="7147232" y="2148840"/>
-            <a:ext cx="4752769" cy="1097280"/>
+            <a:off x="7147232" y="2286000"/>
+            <a:ext cx="4752769" cy="1051560"/>
           </a:xfrm>
           <a:prstGeom prst="rect">
             <a:avLst/>
@@ -2404,508 +2414,21 @@
                 </a:solidFill>
                 <a:latin typeface="Cambria"/>
               </a:rPr>
-              <a:t>A view shows a few consecutive vertebral bodies, often with no C2 or sacrum to count from. Which levels are they?</a:t>
-            </a:r>
-          </a:p>
-        </p:txBody>
-      </p:sp>
-      <mc:AlternateContent xmlns:mc="http://schemas.openxmlformats.org/markup-compatibility/2006">
-        <mc:Choice xmlns:a14="http://schemas.microsoft.com/office/drawing/2010/main" Requires="a14">
-          <p:sp>
-            <p:nvSpPr>
-              <p:cNvPr id="7" name="Equation: problem" descr="LaTeX: x_{1:n} = (x_1, \ldots, x_n),\quad x_i \in \mathbb{R}^{7},\qquad k \in \{1, \ldots, 23-n\}"/>
-              <p:cNvSpPr txBox="1"/>
-              <p:nvPr/>
-            </p:nvSpPr>
-            <p:spPr>
-              <a:xfrm>
-                <a:off x="7147232" y="3429000"/>
-                <a:ext cx="4752769" cy="298125"/>
-              </a:xfrm>
-              <a:prstGeom prst="rect">
-                <a:avLst/>
-              </a:prstGeom>
-              <a:noFill/>
-            </p:spPr>
-            <p:txBody>
-              <a:bodyPr wrap="none" lIns="0" tIns="0" rIns="0" bIns="0" anchor="ctr">
-                <a:noAutofit/>
-              </a:bodyPr>
-              <a:lstStyle/>
-              <a:p>
-                <a:pPr algn="l"/>
-                <a14:m>
-                  <m:oMathPara xmlns:m="http://schemas.openxmlformats.org/officeDocument/2006/math">
-                    <m:oMathParaPr>
-                      <m:jc m:val="left"/>
-                    </m:oMathParaPr>
-                    <m:oMath>
-                      <m:sSub>
-                        <m:e>
-                          <m:r>
-                            <a:rPr lang="en-US" i="1" sz="1617">
-                              <a:solidFill>
-                                <a:srgbClr val="111111"/>
-                              </a:solidFill>
-                              <a:latin typeface="Cambria Math"/>
-                              <a:cs typeface="Cambria Math"/>
-                            </a:rPr>
-                            <m:t>x</m:t>
-                          </m:r>
-                        </m:e>
-                        <m:sub>
-                          <m:r>
-                            <a:rPr lang="en-US" i="1" sz="1617">
-                              <a:solidFill>
-                                <a:srgbClr val="111111"/>
-                              </a:solidFill>
-                              <a:latin typeface="Cambria Math"/>
-                              <a:cs typeface="Cambria Math"/>
-                            </a:rPr>
-                            <m:t>1</m:t>
-                          </m:r>
-                          <m:r>
-                            <m:rPr>
-                              <m:sty m:val="p"/>
-                            </m:rPr>
-                            <a:rPr lang="en-US" i="1" sz="1617">
-                              <a:solidFill>
-                                <a:srgbClr val="111111"/>
-                              </a:solidFill>
-                              <a:latin typeface="Cambria Math"/>
-                              <a:cs typeface="Cambria Math"/>
-                            </a:rPr>
-                            <m:t>:</m:t>
-                          </m:r>
-                          <m:r>
-                            <a:rPr lang="en-US" i="1" sz="1617">
-                              <a:solidFill>
-                                <a:srgbClr val="111111"/>
-                              </a:solidFill>
-                              <a:latin typeface="Cambria Math"/>
-                              <a:cs typeface="Cambria Math"/>
-                            </a:rPr>
-                            <m:t>n</m:t>
-                          </m:r>
-                        </m:sub>
-                      </m:sSub>
-                      <m:r>
-                        <m:rPr>
-                          <m:sty m:val="p"/>
-                        </m:rPr>
-                        <a:rPr lang="en-US" i="1" sz="1617">
-                          <a:solidFill>
-                            <a:srgbClr val="111111"/>
-                          </a:solidFill>
-                          <a:latin typeface="Cambria Math"/>
-                          <a:cs typeface="Cambria Math"/>
-                        </a:rPr>
-                        <m:t>=</m:t>
-                      </m:r>
-                      <m:d>
-                        <m:dPr>
-                          <m:begChr m:val="("/>
-                          <m:endChr m:val=")"/>
-                          <m:sepChr m:val=""/>
-                          <m:grow/>
-                        </m:dPr>
-                        <m:e>
-                          <m:sSub>
-                            <m:e>
-                              <m:r>
-                                <a:rPr lang="en-US" i="1" sz="1617">
-                                  <a:solidFill>
-                                    <a:srgbClr val="111111"/>
-                                  </a:solidFill>
-                                  <a:latin typeface="Cambria Math"/>
-                                  <a:cs typeface="Cambria Math"/>
-                                </a:rPr>
-                                <m:t>x</m:t>
-                              </m:r>
-                            </m:e>
-                            <m:sub>
-                              <m:r>
-                                <a:rPr lang="en-US" i="1" sz="1617">
-                                  <a:solidFill>
-                                    <a:srgbClr val="111111"/>
-                                  </a:solidFill>
-                                  <a:latin typeface="Cambria Math"/>
-                                  <a:cs typeface="Cambria Math"/>
-                                </a:rPr>
-                                <m:t>1</m:t>
-                              </m:r>
-                            </m:sub>
-                          </m:sSub>
-                          <m:r>
-                            <m:rPr>
-                              <m:sty m:val="p"/>
-                            </m:rPr>
-                            <a:rPr lang="en-US" i="1" sz="1617">
-                              <a:solidFill>
-                                <a:srgbClr val="111111"/>
-                              </a:solidFill>
-                              <a:latin typeface="Cambria Math"/>
-                              <a:cs typeface="Cambria Math"/>
-                            </a:rPr>
-                            <m:t>,</m:t>
-                          </m:r>
-                          <m:r>
-                            <m:rPr>
-                              <m:sty m:val="p"/>
-                            </m:rPr>
-                            <a:rPr lang="en-US" i="1" sz="1617">
-                              <a:solidFill>
-                                <a:srgbClr val="111111"/>
-                              </a:solidFill>
-                              <a:latin typeface="Cambria Math"/>
-                              <a:cs typeface="Cambria Math"/>
-                            </a:rPr>
-                            <m:t>…</m:t>
-                          </m:r>
-                          <m:r>
-                            <m:rPr>
-                              <m:sty m:val="p"/>
-                            </m:rPr>
-                            <a:rPr lang="en-US" i="1" sz="1617">
-                              <a:solidFill>
-                                <a:srgbClr val="111111"/>
-                              </a:solidFill>
-                              <a:latin typeface="Cambria Math"/>
-                              <a:cs typeface="Cambria Math"/>
-                            </a:rPr>
-                            <m:t>,</m:t>
-                          </m:r>
-                          <m:sSub>
-                            <m:e>
-                              <m:r>
-                                <a:rPr lang="en-US" i="1" sz="1617">
-                                  <a:solidFill>
-                                    <a:srgbClr val="111111"/>
-                                  </a:solidFill>
-                                  <a:latin typeface="Cambria Math"/>
-                                  <a:cs typeface="Cambria Math"/>
-                                </a:rPr>
-                                <m:t>x</m:t>
-                              </m:r>
-                            </m:e>
-                            <m:sub>
-                              <m:r>
-                                <a:rPr lang="en-US" i="1" sz="1617">
-                                  <a:solidFill>
-                                    <a:srgbClr val="111111"/>
-                                  </a:solidFill>
-                                  <a:latin typeface="Cambria Math"/>
-                                  <a:cs typeface="Cambria Math"/>
-                                </a:rPr>
-                                <m:t>n</m:t>
-                              </m:r>
-                            </m:sub>
-                          </m:sSub>
-                        </m:e>
-                      </m:d>
-                      <m:r>
-                        <m:rPr>
-                          <m:sty m:val="p"/>
-                        </m:rPr>
-                        <a:rPr lang="en-US" i="1" sz="1617">
-                          <a:solidFill>
-                            <a:srgbClr val="111111"/>
-                          </a:solidFill>
-                          <a:latin typeface="Cambria Math"/>
-                          <a:cs typeface="Cambria Math"/>
-                        </a:rPr>
-                        <m:t>,</m:t>
-                      </m:r>
-                      <m:r>
-                        <a:rPr lang="en-US" i="1" sz="1617">
-                          <a:solidFill>
-                            <a:srgbClr val="111111"/>
-                          </a:solidFill>
-                          <a:latin typeface="Cambria Math"/>
-                          <a:cs typeface="Cambria Math"/>
-                        </a:rPr>
-                        <m:t> </m:t>
-                      </m:r>
-                      <m:sSub>
-                        <m:e>
-                          <m:r>
-                            <a:rPr lang="en-US" i="1" sz="1617">
-                              <a:solidFill>
-                                <a:srgbClr val="111111"/>
-                              </a:solidFill>
-                              <a:latin typeface="Cambria Math"/>
-                              <a:cs typeface="Cambria Math"/>
-                            </a:rPr>
-                            <m:t>x</m:t>
-                          </m:r>
-                        </m:e>
-                        <m:sub>
-                          <m:r>
-                            <a:rPr lang="en-US" i="1" sz="1617">
-                              <a:solidFill>
-                                <a:srgbClr val="111111"/>
-                              </a:solidFill>
-                              <a:latin typeface="Cambria Math"/>
-                              <a:cs typeface="Cambria Math"/>
-                            </a:rPr>
-                            <m:t>i</m:t>
-                          </m:r>
-                        </m:sub>
-                      </m:sSub>
-                      <m:r>
-                        <m:rPr>
-                          <m:sty m:val="p"/>
-                        </m:rPr>
-                        <a:rPr lang="en-US" i="1" sz="1617">
-                          <a:solidFill>
-                            <a:srgbClr val="111111"/>
-                          </a:solidFill>
-                          <a:latin typeface="Cambria Math"/>
-                          <a:cs typeface="Cambria Math"/>
-                        </a:rPr>
-                        <m:t>∈</m:t>
-                      </m:r>
-                      <m:sSup>
-                        <m:e>
-                          <m:r>
-                            <m:rPr>
-                              <m:sty m:val="p"/>
-                              <m:scr m:val="double-struck"/>
-                            </m:rPr>
-                            <a:rPr lang="en-US" i="1" sz="1617">
-                              <a:solidFill>
-                                <a:srgbClr val="111111"/>
-                              </a:solidFill>
-                              <a:latin typeface="Cambria Math"/>
-                              <a:cs typeface="Cambria Math"/>
-                            </a:rPr>
-                            <m:t>R</m:t>
-                          </m:r>
-                        </m:e>
-                        <m:sup>
-                          <m:r>
-                            <a:rPr lang="en-US" i="1" sz="1617">
-                              <a:solidFill>
-                                <a:srgbClr val="111111"/>
-                              </a:solidFill>
-                              <a:latin typeface="Cambria Math"/>
-                              <a:cs typeface="Cambria Math"/>
-                            </a:rPr>
-                            <m:t>7</m:t>
-                          </m:r>
-                        </m:sup>
-                      </m:sSup>
-                      <m:r>
-                        <m:rPr>
-                          <m:sty m:val="p"/>
-                        </m:rPr>
-                        <a:rPr lang="en-US" i="1" sz="1617">
-                          <a:solidFill>
-                            <a:srgbClr val="111111"/>
-                          </a:solidFill>
-                          <a:latin typeface="Cambria Math"/>
-                          <a:cs typeface="Cambria Math"/>
-                        </a:rPr>
-                        <m:t>,</m:t>
-                      </m:r>
-                      <m:r>
-                        <a:rPr lang="en-US" i="1" sz="1617">
-                          <a:solidFill>
-                            <a:srgbClr val="111111"/>
-                          </a:solidFill>
-                          <a:latin typeface="Cambria Math"/>
-                          <a:cs typeface="Cambria Math"/>
-                        </a:rPr>
-                        <m:t>  </m:t>
-                      </m:r>
-                      <m:r>
-                        <a:rPr lang="en-US" i="1" sz="1617">
-                          <a:solidFill>
-                            <a:srgbClr val="111111"/>
-                          </a:solidFill>
-                          <a:latin typeface="Cambria Math"/>
-                          <a:cs typeface="Cambria Math"/>
-                        </a:rPr>
-                        <m:t>k</m:t>
-                      </m:r>
-                      <m:r>
-                        <m:rPr>
-                          <m:sty m:val="p"/>
-                        </m:rPr>
-                        <a:rPr lang="en-US" i="1" sz="1617">
-                          <a:solidFill>
-                            <a:srgbClr val="111111"/>
-                          </a:solidFill>
-                          <a:latin typeface="Cambria Math"/>
-                          <a:cs typeface="Cambria Math"/>
-                        </a:rPr>
-                        <m:t>∈</m:t>
-                      </m:r>
-                      <m:r>
-                        <m:rPr>
-                          <m:sty m:val="p"/>
-                        </m:rPr>
-                        <a:rPr lang="en-US" i="1" sz="1617">
-                          <a:solidFill>
-                            <a:srgbClr val="111111"/>
-                          </a:solidFill>
-                          <a:latin typeface="Cambria Math"/>
-                          <a:cs typeface="Cambria Math"/>
-                        </a:rPr>
-                        <m:t>{</m:t>
-                      </m:r>
-                      <m:r>
-                        <a:rPr lang="en-US" i="1" sz="1617">
-                          <a:solidFill>
-                            <a:srgbClr val="111111"/>
-                          </a:solidFill>
-                          <a:latin typeface="Cambria Math"/>
-                          <a:cs typeface="Cambria Math"/>
-                        </a:rPr>
-                        <m:t>1</m:t>
-                      </m:r>
-                      <m:r>
-                        <m:rPr>
-                          <m:sty m:val="p"/>
-                        </m:rPr>
-                        <a:rPr lang="en-US" i="1" sz="1617">
-                          <a:solidFill>
-                            <a:srgbClr val="111111"/>
-                          </a:solidFill>
-                          <a:latin typeface="Cambria Math"/>
-                          <a:cs typeface="Cambria Math"/>
-                        </a:rPr>
-                        <m:t>,</m:t>
-                      </m:r>
-                      <m:r>
-                        <m:rPr>
-                          <m:sty m:val="p"/>
-                        </m:rPr>
-                        <a:rPr lang="en-US" i="1" sz="1617">
-                          <a:solidFill>
-                            <a:srgbClr val="111111"/>
-                          </a:solidFill>
-                          <a:latin typeface="Cambria Math"/>
-                          <a:cs typeface="Cambria Math"/>
-                        </a:rPr>
-                        <m:t>…</m:t>
-                      </m:r>
-                      <m:r>
-                        <m:rPr>
-                          <m:sty m:val="p"/>
-                        </m:rPr>
-                        <a:rPr lang="en-US" i="1" sz="1617">
-                          <a:solidFill>
-                            <a:srgbClr val="111111"/>
-                          </a:solidFill>
-                          <a:latin typeface="Cambria Math"/>
-                          <a:cs typeface="Cambria Math"/>
-                        </a:rPr>
-                        <m:t>,</m:t>
-                      </m:r>
-                      <m:r>
-                        <a:rPr lang="en-US" i="1" sz="1617">
-                          <a:solidFill>
-                            <a:srgbClr val="111111"/>
-                          </a:solidFill>
-                          <a:latin typeface="Cambria Math"/>
-                          <a:cs typeface="Cambria Math"/>
-                        </a:rPr>
-                        <m:t>23</m:t>
-                      </m:r>
-                      <m:r>
-                        <m:rPr>
-                          <m:sty m:val="p"/>
-                        </m:rPr>
-                        <a:rPr lang="en-US" i="1" sz="1617">
-                          <a:solidFill>
-                            <a:srgbClr val="111111"/>
-                          </a:solidFill>
-                          <a:latin typeface="Cambria Math"/>
-                          <a:cs typeface="Cambria Math"/>
-                        </a:rPr>
-                        <m:t>−</m:t>
-                      </m:r>
-                      <m:r>
-                        <a:rPr lang="en-US" i="1" sz="1617">
-                          <a:solidFill>
-                            <a:srgbClr val="111111"/>
-                          </a:solidFill>
-                          <a:latin typeface="Cambria Math"/>
-                          <a:cs typeface="Cambria Math"/>
-                        </a:rPr>
-                        <m:t>n</m:t>
-                      </m:r>
-                      <m:r>
-                        <m:rPr>
-                          <m:sty m:val="p"/>
-                        </m:rPr>
-                        <a:rPr lang="en-US" i="1" sz="1617">
-                          <a:solidFill>
-                            <a:srgbClr val="111111"/>
-                          </a:solidFill>
-                          <a:latin typeface="Cambria Math"/>
-                          <a:cs typeface="Cambria Math"/>
-                        </a:rPr>
-                        <m:t>}</m:t>
-                      </m:r>
-                    </m:oMath>
-                  </m:oMathPara>
-                </a14:m>
-                <a:endParaRPr lang="en-US" sz="1617"/>
-              </a:p>
-            </p:txBody>
-          </p:sp>
-        </mc:Choice>
-        <mc:Fallback>
-          <p:sp>
-            <p:nvSpPr>
-              <p:cNvPr id="7" name="Equation: problem" descr="LaTeX: x_{1:n} = (x_1, \ldots, x_n),\quad x_i \in \mathbb{R}^{7},\qquad k \in \{1, \ldots, 23-n\}"/>
-              <p:cNvSpPr txBox="1">
-                <a:spLocks noRot="1" noChangeAspect="1" noMove="1" noResize="1" noEditPoints="1" noAdjustHandles="1" noChangeArrowheads="1" noChangeShapeType="1" noTextEdit="1"/>
-              </p:cNvSpPr>
-              <p:nvPr/>
-            </p:nvSpPr>
-            <p:spPr>
-              <a:xfrm>
-                <a:off x="7147232" y="3429000"/>
-                <a:ext cx="4752769" cy="298125"/>
-              </a:xfrm>
-              <a:prstGeom prst="rect">
-                <a:avLst/>
-              </a:prstGeom>
-              <a:blipFill>
-                <a:blip r:embed="rId4"/>
-                <a:stretch>
-                  <a:fillRect/>
-                </a:stretch>
-              </a:blipFill>
-            </p:spPr>
-            <p:txBody>
-              <a:bodyPr/>
-              <a:lstStyle/>
-              <a:p>
-                <a:r>
-                  <a:rPr lang="en-US">
-                    <a:noFill/>
-                  </a:rPr>
-                  <a:t> </a:t>
-                </a:r>
-              </a:p>
-            </p:txBody>
-          </p:sp>
-        </mc:Fallback>
-      </mc:AlternateContent>
-      <p:sp>
-        <p:nvSpPr>
-          <p:cNvPr id="8" name="Text: unknown"/>
+              <a:t>A view shows a few consecutive vertebral bodies, often with no C2 or sacrum to count from.</a:t>
+            </a:r>
+          </a:p>
+        </p:txBody>
+      </p:sp>
+      <p:sp>
+        <p:nvSpPr>
+          <p:cNvPr id="7" name="Text: unknown"/>
           <p:cNvSpPr txBox="1"/>
           <p:nvPr/>
         </p:nvSpPr>
         <p:spPr>
           <a:xfrm>
-            <a:off x="7147232" y="3977639"/>
-            <a:ext cx="4752769" cy="914400"/>
+            <a:off x="7147232" y="3429000"/>
+            <a:ext cx="4752769" cy="777240"/>
           </a:xfrm>
           <a:prstGeom prst="rect">
             <a:avLst/>
@@ -2924,45 +2447,27 @@
               </a:spcAft>
             </a:pPr>
             <a:r>
-              <a:rPr sz="1600" b="0" i="0">
-                <a:solidFill>
-                  <a:srgbClr val="111111"/>
-                </a:solidFill>
-                <a:latin typeface="Cambria"/>
-              </a:rPr>
-              <a:t>Seven measures per body. The view's place </a:t>
-            </a:r>
-            <a:r>
-              <a:rPr sz="1600" b="0" i="1">
-                <a:solidFill>
-                  <a:srgbClr val="111111"/>
-                </a:solidFill>
-                <a:latin typeface="Cambria"/>
-              </a:rPr>
-              <a:t>k</a:t>
-            </a:r>
-            <a:r>
-              <a:rPr sz="1600" b="0" i="0">
-                <a:solidFill>
-                  <a:srgbClr val="111111"/>
-                </a:solidFill>
-                <a:latin typeface="Cambria"/>
-              </a:rPr>
-              <a:t> among the 22 levels from C3 to L5 names every body in it.</a:t>
-            </a:r>
-          </a:p>
-        </p:txBody>
-      </p:sp>
-      <p:sp>
-        <p:nvSpPr>
-          <p:cNvPr id="9" name="Text: data"/>
+              <a:rPr sz="2000" b="1" i="0">
+                <a:solidFill>
+                  <a:srgbClr val="191D63"/>
+                </a:solidFill>
+                <a:latin typeface="Cambria"/>
+              </a:rPr>
+              <a:t>Seven measures per body. Which levels are in view?</a:t>
+            </a:r>
+          </a:p>
+        </p:txBody>
+      </p:sp>
+      <p:sp>
+        <p:nvSpPr>
+          <p:cNvPr id="8" name="Text: data"/>
           <p:cNvSpPr txBox="1"/>
           <p:nvPr/>
         </p:nvSpPr>
         <p:spPr>
           <a:xfrm>
-            <a:off x="7147232" y="4983480"/>
-            <a:ext cx="4752769" cy="1097280"/>
+            <a:off x="7147232" y="4389120"/>
+            <a:ext cx="4752769" cy="914400"/>
           </a:xfrm>
           <a:prstGeom prst="rect">
             <a:avLst/>
@@ -2987,21 +2492,21 @@
                 </a:solidFill>
                 <a:latin typeface="Cambria"/>
               </a:rPr>
-              <a:t>2,000 synthetic columns drawn from Panjabi's published means and spreads; every place of every column scored, so each rate below is over tens of thousands of fields.</a:t>
-            </a:r>
-          </a:p>
-        </p:txBody>
-      </p:sp>
-      <p:sp>
-        <p:nvSpPr>
-          <p:cNvPr id="10" name="Text: citation"/>
+              <a:t>2,000 synthetic columns drawn from Panjabi's published means and spreads; every field of every column scored, so most rates below are over tens of thousands of fields.</a:t>
+            </a:r>
+          </a:p>
+        </p:txBody>
+      </p:sp>
+      <p:sp>
+        <p:nvSpPr>
+          <p:cNvPr id="9" name="Text: footer"/>
           <p:cNvSpPr txBox="1"/>
           <p:nvPr/>
         </p:nvSpPr>
         <p:spPr>
           <a:xfrm>
-            <a:off x="1750161" y="6327648"/>
-            <a:ext cx="8869604" cy="365760"/>
+            <a:off x="1750161" y="6272784"/>
+            <a:ext cx="9120631" cy="411480"/>
           </a:xfrm>
           <a:prstGeom prst="rect">
             <a:avLst/>
@@ -3020,27 +2525,43 @@
               </a:spcAft>
             </a:pPr>
             <a:r>
-              <a:rPr sz="900" b="0" i="0">
+              <a:rPr sz="1100" b="0" i="0">
                 <a:solidFill>
                   <a:srgbClr val="595959"/>
                 </a:solidFill>
                 <a:latin typeface="Cambria"/>
               </a:rPr>
-              <a:t>Synthetic columns drawn from Panjabi's published means and spreads (Spine 1991;16:861, 888; 1992;17:299); no patient data. Retrospective modelling, 2026.</a:t>
-            </a:r>
-          </a:p>
-        </p:txBody>
-      </p:sp>
-      <p:sp>
-        <p:nvSpPr>
-          <p:cNvPr id="11" name="Text: slide number"/>
+              <a:t>Synthetic columns from Panjabi's published tables (Spine 1991;16:861, 888; 1992;17:299); no patient data.</a:t>
+            </a:r>
+          </a:p>
+          <a:p>
+            <a:pPr algn="l">
+              <a:spcAft>
+                <a:spcPts val="0"/>
+              </a:spcAft>
+            </a:pPr>
+            <a:r>
+              <a:rPr sz="1100" b="1" i="0">
+                <a:solidFill>
+                  <a:srgbClr val="111111"/>
+                </a:solidFill>
+                <a:latin typeface="Cambria"/>
+              </a:rPr>
+              <a:t>Confidential: pre-filing draft, not for distribution</a:t>
+            </a:r>
+          </a:p>
+        </p:txBody>
+      </p:sp>
+      <p:sp>
+        <p:nvSpPr>
+          <p:cNvPr id="10" name="Text: slide number"/>
           <p:cNvSpPr txBox="1"/>
           <p:nvPr/>
         </p:nvSpPr>
         <p:spPr>
           <a:xfrm>
-            <a:off x="11063246" y="6327648"/>
-            <a:ext cx="836755" cy="365760"/>
+            <a:off x="11063246" y="6272784"/>
+            <a:ext cx="836755" cy="274320"/>
           </a:xfrm>
           <a:prstGeom prst="rect">
             <a:avLst/>
@@ -3059,7 +2580,7 @@
               </a:spcAft>
             </a:pPr>
             <a:r>
-              <a:rPr sz="900" b="0" i="0">
+              <a:rPr sz="1100" b="0" i="0">
                 <a:solidFill>
                   <a:srgbClr val="595959"/>
                 </a:solidFill>
@@ -3116,596 +2637,21 @@
                 </a:solidFill>
                 <a:latin typeface="Cambria"/>
               </a:rPr>
-              <a:t>Bayes' rule over every place is the ceiling</a:t>
-            </a:r>
-          </a:p>
-        </p:txBody>
-      </p:sp>
-      <mc:AlternateContent xmlns:mc="http://schemas.openxmlformats.org/markup-compatibility/2006">
-        <mc:Choice xmlns:a14="http://schemas.microsoft.com/office/drawing/2010/main" Requires="a14">
-          <p:sp>
-            <p:nvSpPr>
-              <p:cNvPr id="3" name="Equation: bayes" descr="LaTeX: p(k \mid x_{1:n}) = \dfrac{p(x_{1:n} \mid k)\, p(k)}{\sum_{k'=1}^{23-n} p(x_{1:n} \mid k')\, p(k')}"/>
-              <p:cNvSpPr txBox="1"/>
-              <p:nvPr/>
-            </p:nvSpPr>
-            <p:spPr>
-              <a:xfrm>
-                <a:off x="1750161" y="1371600"/>
-                <a:ext cx="4547616" cy="1356360"/>
-              </a:xfrm>
-              <a:prstGeom prst="rect">
-                <a:avLst/>
-              </a:prstGeom>
-              <a:noFill/>
-            </p:spPr>
-            <p:txBody>
-              <a:bodyPr wrap="none" lIns="0" tIns="0" rIns="0" bIns="0" anchor="ctr">
-                <a:noAutofit/>
-              </a:bodyPr>
-              <a:lstStyle/>
-              <a:p>
-                <a:pPr algn="l"/>
-                <a14:m>
-                  <m:oMathPara xmlns:m="http://schemas.openxmlformats.org/officeDocument/2006/math">
-                    <m:oMathParaPr>
-                      <m:jc m:val="left"/>
-                    </m:oMathParaPr>
-                    <m:oMath>
-                      <m:r>
-                        <a:rPr lang="en-US" i="1" sz="2400">
-                          <a:solidFill>
-                            <a:srgbClr val="111111"/>
-                          </a:solidFill>
-                          <a:latin typeface="Cambria Math"/>
-                          <a:cs typeface="Cambria Math"/>
-                        </a:rPr>
-                        <m:t>p</m:t>
-                      </m:r>
-                      <m:d>
-                        <m:dPr>
-                          <m:begChr m:val="("/>
-                          <m:endChr m:val=")"/>
-                          <m:sepChr m:val=""/>
-                          <m:grow/>
-                        </m:dPr>
-                        <m:e>
-                          <m:r>
-                            <a:rPr lang="en-US" i="1" sz="2400">
-                              <a:solidFill>
-                                <a:srgbClr val="111111"/>
-                              </a:solidFill>
-                              <a:latin typeface="Cambria Math"/>
-                              <a:cs typeface="Cambria Math"/>
-                            </a:rPr>
-                            <m:t>k</m:t>
-                          </m:r>
-                          <m:r>
-                            <m:rPr>
-                              <m:sty m:val="p"/>
-                            </m:rPr>
-                            <a:rPr lang="en-US" i="1" sz="2400">
-                              <a:solidFill>
-                                <a:srgbClr val="111111"/>
-                              </a:solidFill>
-                              <a:latin typeface="Cambria Math"/>
-                              <a:cs typeface="Cambria Math"/>
-                            </a:rPr>
-                            <m:t>∣</m:t>
-                          </m:r>
-                          <m:sSub>
-                            <m:e>
-                              <m:r>
-                                <a:rPr lang="en-US" i="1" sz="2400">
-                                  <a:solidFill>
-                                    <a:srgbClr val="111111"/>
-                                  </a:solidFill>
-                                  <a:latin typeface="Cambria Math"/>
-                                  <a:cs typeface="Cambria Math"/>
-                                </a:rPr>
-                                <m:t>x</m:t>
-                              </m:r>
-                            </m:e>
-                            <m:sub>
-                              <m:r>
-                                <a:rPr lang="en-US" i="1" sz="2400">
-                                  <a:solidFill>
-                                    <a:srgbClr val="111111"/>
-                                  </a:solidFill>
-                                  <a:latin typeface="Cambria Math"/>
-                                  <a:cs typeface="Cambria Math"/>
-                                </a:rPr>
-                                <m:t>1</m:t>
-                              </m:r>
-                              <m:r>
-                                <m:rPr>
-                                  <m:sty m:val="p"/>
-                                </m:rPr>
-                                <a:rPr lang="en-US" i="1" sz="2400">
-                                  <a:solidFill>
-                                    <a:srgbClr val="111111"/>
-                                  </a:solidFill>
-                                  <a:latin typeface="Cambria Math"/>
-                                  <a:cs typeface="Cambria Math"/>
-                                </a:rPr>
-                                <m:t>:</m:t>
-                              </m:r>
-                              <m:r>
-                                <a:rPr lang="en-US" i="1" sz="2400">
-                                  <a:solidFill>
-                                    <a:srgbClr val="111111"/>
-                                  </a:solidFill>
-                                  <a:latin typeface="Cambria Math"/>
-                                  <a:cs typeface="Cambria Math"/>
-                                </a:rPr>
-                                <m:t>n</m:t>
-                              </m:r>
-                            </m:sub>
-                          </m:sSub>
-                        </m:e>
-                      </m:d>
-                      <m:r>
-                        <m:rPr>
-                          <m:sty m:val="p"/>
-                        </m:rPr>
-                        <a:rPr lang="en-US" i="1" sz="2400">
-                          <a:solidFill>
-                            <a:srgbClr val="111111"/>
-                          </a:solidFill>
-                          <a:latin typeface="Cambria Math"/>
-                          <a:cs typeface="Cambria Math"/>
-                        </a:rPr>
-                        <m:t>=</m:t>
-                      </m:r>
-                      <m:f>
-                        <m:fPr>
-                          <m:type m:val="bar"/>
-                        </m:fPr>
-                        <m:num>
-                          <m:r>
-                            <a:rPr lang="en-US" i="1" sz="2400">
-                              <a:solidFill>
-                                <a:srgbClr val="111111"/>
-                              </a:solidFill>
-                              <a:latin typeface="Cambria Math"/>
-                              <a:cs typeface="Cambria Math"/>
-                            </a:rPr>
-                            <m:t>p</m:t>
-                          </m:r>
-                          <m:d>
-                            <m:dPr>
-                              <m:begChr m:val="("/>
-                              <m:endChr m:val=")"/>
-                              <m:sepChr m:val=""/>
-                              <m:grow/>
-                            </m:dPr>
-                            <m:e>
-                              <m:sSub>
-                                <m:e>
-                                  <m:r>
-                                    <a:rPr lang="en-US" i="1" sz="2400">
-                                      <a:solidFill>
-                                        <a:srgbClr val="111111"/>
-                                      </a:solidFill>
-                                      <a:latin typeface="Cambria Math"/>
-                                      <a:cs typeface="Cambria Math"/>
-                                    </a:rPr>
-                                    <m:t>x</m:t>
-                                  </m:r>
-                                </m:e>
-                                <m:sub>
-                                  <m:r>
-                                    <a:rPr lang="en-US" i="1" sz="2400">
-                                      <a:solidFill>
-                                        <a:srgbClr val="111111"/>
-                                      </a:solidFill>
-                                      <a:latin typeface="Cambria Math"/>
-                                      <a:cs typeface="Cambria Math"/>
-                                    </a:rPr>
-                                    <m:t>1</m:t>
-                                  </m:r>
-                                  <m:r>
-                                    <m:rPr>
-                                      <m:sty m:val="p"/>
-                                    </m:rPr>
-                                    <a:rPr lang="en-US" i="1" sz="2400">
-                                      <a:solidFill>
-                                        <a:srgbClr val="111111"/>
-                                      </a:solidFill>
-                                      <a:latin typeface="Cambria Math"/>
-                                      <a:cs typeface="Cambria Math"/>
-                                    </a:rPr>
-                                    <m:t>:</m:t>
-                                  </m:r>
-                                  <m:r>
-                                    <a:rPr lang="en-US" i="1" sz="2400">
-                                      <a:solidFill>
-                                        <a:srgbClr val="111111"/>
-                                      </a:solidFill>
-                                      <a:latin typeface="Cambria Math"/>
-                                      <a:cs typeface="Cambria Math"/>
-                                    </a:rPr>
-                                    <m:t>n</m:t>
-                                  </m:r>
-                                </m:sub>
-                              </m:sSub>
-                              <m:r>
-                                <m:rPr>
-                                  <m:sty m:val="p"/>
-                                </m:rPr>
-                                <a:rPr lang="en-US" i="1" sz="2400">
-                                  <a:solidFill>
-                                    <a:srgbClr val="111111"/>
-                                  </a:solidFill>
-                                  <a:latin typeface="Cambria Math"/>
-                                  <a:cs typeface="Cambria Math"/>
-                                </a:rPr>
-                                <m:t>∣</m:t>
-                              </m:r>
-                              <m:r>
-                                <a:rPr lang="en-US" i="1" sz="2400">
-                                  <a:solidFill>
-                                    <a:srgbClr val="111111"/>
-                                  </a:solidFill>
-                                  <a:latin typeface="Cambria Math"/>
-                                  <a:cs typeface="Cambria Math"/>
-                                </a:rPr>
-                                <m:t>k</m:t>
-                              </m:r>
-                            </m:e>
-                          </m:d>
-                          <m:r>
-                            <a:rPr lang="en-US" i="1" sz="2400">
-                              <a:solidFill>
-                                <a:srgbClr val="111111"/>
-                              </a:solidFill>
-                              <a:latin typeface="Cambria Math"/>
-                              <a:cs typeface="Cambria Math"/>
-                            </a:rPr>
-                            <m:t> </m:t>
-                          </m:r>
-                          <m:r>
-                            <a:rPr lang="en-US" i="1" sz="2400">
-                              <a:solidFill>
-                                <a:srgbClr val="111111"/>
-                              </a:solidFill>
-                              <a:latin typeface="Cambria Math"/>
-                              <a:cs typeface="Cambria Math"/>
-                            </a:rPr>
-                            <m:t>p</m:t>
-                          </m:r>
-                          <m:d>
-                            <m:dPr>
-                              <m:begChr m:val="("/>
-                              <m:endChr m:val=")"/>
-                              <m:sepChr m:val=""/>
-                              <m:grow/>
-                            </m:dPr>
-                            <m:e>
-                              <m:r>
-                                <a:rPr lang="en-US" i="1" sz="2400">
-                                  <a:solidFill>
-                                    <a:srgbClr val="111111"/>
-                                  </a:solidFill>
-                                  <a:latin typeface="Cambria Math"/>
-                                  <a:cs typeface="Cambria Math"/>
-                                </a:rPr>
-                                <m:t>k</m:t>
-                              </m:r>
-                            </m:e>
-                          </m:d>
-                        </m:num>
-                        <m:den>
-                          <m:nary>
-                            <m:naryPr>
-                              <m:chr m:val="∑"/>
-                              <m:limLoc m:val="undOvr"/>
-                              <m:subHide m:val="off"/>
-                              <m:supHide m:val="off"/>
-                            </m:naryPr>
-                            <m:sub>
-                              <m:r>
-                                <a:rPr lang="en-US" i="1" sz="2400">
-                                  <a:solidFill>
-                                    <a:srgbClr val="111111"/>
-                                  </a:solidFill>
-                                  <a:latin typeface="Cambria Math"/>
-                                  <a:cs typeface="Cambria Math"/>
-                                </a:rPr>
-                                <m:t>k</m:t>
-                              </m:r>
-                              <m:r>
-                                <m:rPr>
-                                  <m:sty m:val="p"/>
-                                </m:rPr>
-                                <a:rPr lang="en-US" i="1" sz="2400">
-                                  <a:solidFill>
-                                    <a:srgbClr val="111111"/>
-                                  </a:solidFill>
-                                  <a:latin typeface="Cambria Math"/>
-                                  <a:cs typeface="Cambria Math"/>
-                                </a:rPr>
-                                <m:t>′</m:t>
-                              </m:r>
-                              <m:r>
-                                <m:rPr>
-                                  <m:sty m:val="p"/>
-                                </m:rPr>
-                                <a:rPr lang="en-US" i="1" sz="2400">
-                                  <a:solidFill>
-                                    <a:srgbClr val="111111"/>
-                                  </a:solidFill>
-                                  <a:latin typeface="Cambria Math"/>
-                                  <a:cs typeface="Cambria Math"/>
-                                </a:rPr>
-                                <m:t>=</m:t>
-                              </m:r>
-                              <m:r>
-                                <a:rPr lang="en-US" i="1" sz="2400">
-                                  <a:solidFill>
-                                    <a:srgbClr val="111111"/>
-                                  </a:solidFill>
-                                  <a:latin typeface="Cambria Math"/>
-                                  <a:cs typeface="Cambria Math"/>
-                                </a:rPr>
-                                <m:t>1</m:t>
-                              </m:r>
-                            </m:sub>
-                            <m:sup>
-                              <m:r>
-                                <a:rPr lang="en-US" i="1" sz="2400">
-                                  <a:solidFill>
-                                    <a:srgbClr val="111111"/>
-                                  </a:solidFill>
-                                  <a:latin typeface="Cambria Math"/>
-                                  <a:cs typeface="Cambria Math"/>
-                                </a:rPr>
-                                <m:t>23</m:t>
-                              </m:r>
-                              <m:r>
-                                <m:rPr>
-                                  <m:sty m:val="p"/>
-                                </m:rPr>
-                                <a:rPr lang="en-US" i="1" sz="2400">
-                                  <a:solidFill>
-                                    <a:srgbClr val="111111"/>
-                                  </a:solidFill>
-                                  <a:latin typeface="Cambria Math"/>
-                                  <a:cs typeface="Cambria Math"/>
-                                </a:rPr>
-                                <m:t>−</m:t>
-                              </m:r>
-                              <m:r>
-                                <a:rPr lang="en-US" i="1" sz="2400">
-                                  <a:solidFill>
-                                    <a:srgbClr val="111111"/>
-                                  </a:solidFill>
-                                  <a:latin typeface="Cambria Math"/>
-                                  <a:cs typeface="Cambria Math"/>
-                                </a:rPr>
-                                <m:t>n</m:t>
-                              </m:r>
-                            </m:sup>
-                            <m:e>
-                              <m:r>
-                                <a:rPr lang="en-US" i="1" sz="2400">
-                                  <a:solidFill>
-                                    <a:srgbClr val="111111"/>
-                                  </a:solidFill>
-                                  <a:latin typeface="Cambria Math"/>
-                                  <a:cs typeface="Cambria Math"/>
-                                </a:rPr>
-                                <m:t>p</m:t>
-                              </m:r>
-                            </m:e>
-                          </m:nary>
-                          <m:d>
-                            <m:dPr>
-                              <m:begChr m:val="("/>
-                              <m:endChr m:val=")"/>
-                              <m:sepChr m:val=""/>
-                              <m:grow/>
-                            </m:dPr>
-                            <m:e>
-                              <m:sSub>
-                                <m:e>
-                                  <m:r>
-                                    <a:rPr lang="en-US" i="1" sz="2400">
-                                      <a:solidFill>
-                                        <a:srgbClr val="111111"/>
-                                      </a:solidFill>
-                                      <a:latin typeface="Cambria Math"/>
-                                      <a:cs typeface="Cambria Math"/>
-                                    </a:rPr>
-                                    <m:t>x</m:t>
-                                  </m:r>
-                                </m:e>
-                                <m:sub>
-                                  <m:r>
-                                    <a:rPr lang="en-US" i="1" sz="2400">
-                                      <a:solidFill>
-                                        <a:srgbClr val="111111"/>
-                                      </a:solidFill>
-                                      <a:latin typeface="Cambria Math"/>
-                                      <a:cs typeface="Cambria Math"/>
-                                    </a:rPr>
-                                    <m:t>1</m:t>
-                                  </m:r>
-                                  <m:r>
-                                    <m:rPr>
-                                      <m:sty m:val="p"/>
-                                    </m:rPr>
-                                    <a:rPr lang="en-US" i="1" sz="2400">
-                                      <a:solidFill>
-                                        <a:srgbClr val="111111"/>
-                                      </a:solidFill>
-                                      <a:latin typeface="Cambria Math"/>
-                                      <a:cs typeface="Cambria Math"/>
-                                    </a:rPr>
-                                    <m:t>:</m:t>
-                                  </m:r>
-                                  <m:r>
-                                    <a:rPr lang="en-US" i="1" sz="2400">
-                                      <a:solidFill>
-                                        <a:srgbClr val="111111"/>
-                                      </a:solidFill>
-                                      <a:latin typeface="Cambria Math"/>
-                                      <a:cs typeface="Cambria Math"/>
-                                    </a:rPr>
-                                    <m:t>n</m:t>
-                                  </m:r>
-                                </m:sub>
-                              </m:sSub>
-                              <m:r>
-                                <m:rPr>
-                                  <m:sty m:val="p"/>
-                                </m:rPr>
-                                <a:rPr lang="en-US" i="1" sz="2400">
-                                  <a:solidFill>
-                                    <a:srgbClr val="111111"/>
-                                  </a:solidFill>
-                                  <a:latin typeface="Cambria Math"/>
-                                  <a:cs typeface="Cambria Math"/>
-                                </a:rPr>
-                                <m:t>∣</m:t>
-                              </m:r>
-                              <m:r>
-                                <a:rPr lang="en-US" i="1" sz="2400">
-                                  <a:solidFill>
-                                    <a:srgbClr val="111111"/>
-                                  </a:solidFill>
-                                  <a:latin typeface="Cambria Math"/>
-                                  <a:cs typeface="Cambria Math"/>
-                                </a:rPr>
-                                <m:t>k</m:t>
-                              </m:r>
-                              <m:r>
-                                <m:rPr>
-                                  <m:sty m:val="p"/>
-                                </m:rPr>
-                                <a:rPr lang="en-US" i="1" sz="2400">
-                                  <a:solidFill>
-                                    <a:srgbClr val="111111"/>
-                                  </a:solidFill>
-                                  <a:latin typeface="Cambria Math"/>
-                                  <a:cs typeface="Cambria Math"/>
-                                </a:rPr>
-                                <m:t>′</m:t>
-                              </m:r>
-                            </m:e>
-                          </m:d>
-                          <m:r>
-                            <a:rPr lang="en-US" i="1" sz="2400">
-                              <a:solidFill>
-                                <a:srgbClr val="111111"/>
-                              </a:solidFill>
-                              <a:latin typeface="Cambria Math"/>
-                              <a:cs typeface="Cambria Math"/>
-                            </a:rPr>
-                            <m:t> </m:t>
-                          </m:r>
-                          <m:r>
-                            <a:rPr lang="en-US" i="1" sz="2400">
-                              <a:solidFill>
-                                <a:srgbClr val="111111"/>
-                              </a:solidFill>
-                              <a:latin typeface="Cambria Math"/>
-                              <a:cs typeface="Cambria Math"/>
-                            </a:rPr>
-                            <m:t>p</m:t>
-                          </m:r>
-                          <m:d>
-                            <m:dPr>
-                              <m:begChr m:val="("/>
-                              <m:endChr m:val=")"/>
-                              <m:sepChr m:val=""/>
-                              <m:grow/>
-                            </m:dPr>
-                            <m:e>
-                              <m:r>
-                                <a:rPr lang="en-US" i="1" sz="2400">
-                                  <a:solidFill>
-                                    <a:srgbClr val="111111"/>
-                                  </a:solidFill>
-                                  <a:latin typeface="Cambria Math"/>
-                                  <a:cs typeface="Cambria Math"/>
-                                </a:rPr>
-                                <m:t>k</m:t>
-                              </m:r>
-                              <m:r>
-                                <m:rPr>
-                                  <m:sty m:val="p"/>
-                                </m:rPr>
-                                <a:rPr lang="en-US" i="1" sz="2400">
-                                  <a:solidFill>
-                                    <a:srgbClr val="111111"/>
-                                  </a:solidFill>
-                                  <a:latin typeface="Cambria Math"/>
-                                  <a:cs typeface="Cambria Math"/>
-                                </a:rPr>
-                                <m:t>′</m:t>
-                              </m:r>
-                            </m:e>
-                          </m:d>
-                        </m:den>
-                      </m:f>
-                    </m:oMath>
-                  </m:oMathPara>
-                </a14:m>
-                <a:endParaRPr lang="en-US" sz="2400"/>
-              </a:p>
-            </p:txBody>
-          </p:sp>
-        </mc:Choice>
-        <mc:Fallback>
-          <p:sp>
-            <p:nvSpPr>
-              <p:cNvPr id="3" name="Equation: bayes" descr="LaTeX: p(k \mid x_{1:n}) = \dfrac{p(x_{1:n} \mid k)\, p(k)}{\sum_{k'=1}^{23-n} p(x_{1:n} \mid k')\, p(k')}"/>
-              <p:cNvSpPr txBox="1">
-                <a:spLocks noRot="1" noChangeAspect="1" noMove="1" noResize="1" noEditPoints="1" noAdjustHandles="1" noChangeArrowheads="1" noChangeShapeType="1" noTextEdit="1"/>
-              </p:cNvSpPr>
-              <p:nvPr/>
-            </p:nvSpPr>
-            <p:spPr>
-              <a:xfrm>
-                <a:off x="1750161" y="1371600"/>
-                <a:ext cx="4547616" cy="1356360"/>
-              </a:xfrm>
-              <a:prstGeom prst="rect">
-                <a:avLst/>
-              </a:prstGeom>
-              <a:blipFill>
-                <a:blip r:embed="rId2"/>
-                <a:stretch>
-                  <a:fillRect/>
-                </a:stretch>
-              </a:blipFill>
-            </p:spPr>
-            <p:txBody>
-              <a:bodyPr/>
-              <a:lstStyle/>
-              <a:p>
-                <a:r>
-                  <a:rPr lang="en-US">
-                    <a:noFill/>
-                  </a:rPr>
-                  <a:t> </a:t>
-                </a:r>
-              </a:p>
-            </p:txBody>
-          </p:sp>
-        </mc:Fallback>
-      </mc:AlternateContent>
-      <p:sp>
-        <p:nvSpPr>
-          <p:cNvPr id="4" name="Text: in words"/>
+              <a:t>More bodies in view, more certainty about the level</a:t>
+            </a:r>
+          </a:p>
+        </p:txBody>
+      </p:sp>
+      <p:sp>
+        <p:nvSpPr>
+          <p:cNvPr id="3" name="Text: result"/>
           <p:cNvSpPr txBox="1"/>
           <p:nvPr/>
         </p:nvSpPr>
         <p:spPr>
           <a:xfrm>
-            <a:off x="1750161" y="2773680"/>
-            <a:ext cx="4811342" cy="457200"/>
+            <a:off x="1750161" y="1417320"/>
+            <a:ext cx="4727666" cy="914400"/>
           </a:xfrm>
           <a:prstGeom prst="rect">
             <a:avLst/>
@@ -3724,647 +2670,27 @@
               </a:spcAft>
             </a:pPr>
             <a:r>
-              <a:rPr sz="1800" b="1" i="0">
-                <a:solidFill>
-                  <a:srgbClr val="1B4F8C"/>
-                </a:solidFill>
-                <a:latin typeface="Cambria"/>
-              </a:rPr>
-              <a:t>posterior</a:t>
-            </a:r>
-            <a:r>
-              <a:rPr sz="1800" b="0" i="0">
+              <a:rPr sz="2000" b="0" i="0">
                 <a:solidFill>
                   <a:srgbClr val="111111"/>
                 </a:solidFill>
                 <a:latin typeface="Cambria"/>
               </a:rPr>
-              <a:t>  ∝  likelihood  ×  </a:t>
-            </a:r>
-            <a:r>
-              <a:rPr sz="1800" b="1" i="0">
-                <a:solidFill>
-                  <a:srgbClr val="595959"/>
-                </a:solidFill>
-                <a:latin typeface="Cambria"/>
-              </a:rPr>
-              <a:t>prior</a:t>
-            </a:r>
-            <a:r>
-              <a:rPr sz="1800" b="0" i="0">
-                <a:solidFill>
-                  <a:srgbClr val="111111"/>
-                </a:solidFill>
-                <a:latin typeface="Cambria"/>
-              </a:rPr>
-              <a:t>,  over all 23 − n places</a:t>
-            </a:r>
-          </a:p>
-        </p:txBody>
-      </p:sp>
-      <mc:AlternateContent xmlns:mc="http://schemas.openxmlformats.org/markup-compatibility/2006">
-        <mc:Choice xmlns:a14="http://schemas.microsoft.com/office/drawing/2010/main" Requires="a14">
-          <p:sp>
-            <p:nvSpPr>
-              <p:cNvPr id="5" name="Equation: likelihood" descr="LaTeX: p(x_{1:n} \mid k) = \int \prod_{m=1}^{7} \mathcal{N}\left(x_{m,1:n} \mid s\,\mu_{m,k},\;\Sigma_{m,k}(s)\right)\, p(s)\, ds"/>
-              <p:cNvSpPr txBox="1"/>
-              <p:nvPr/>
-            </p:nvSpPr>
-            <p:spPr>
-              <a:xfrm>
-                <a:off x="1750161" y="3413760"/>
-                <a:ext cx="4811342" cy="619604"/>
-              </a:xfrm>
-              <a:prstGeom prst="rect">
-                <a:avLst/>
-              </a:prstGeom>
-              <a:noFill/>
-            </p:spPr>
-            <p:txBody>
-              <a:bodyPr wrap="none" lIns="0" tIns="0" rIns="0" bIns="0" anchor="ctr">
-                <a:noAutofit/>
-              </a:bodyPr>
-              <a:lstStyle/>
-              <a:p>
-                <a:pPr algn="l"/>
-                <a14:m>
-                  <m:oMathPara xmlns:m="http://schemas.openxmlformats.org/officeDocument/2006/math">
-                    <m:oMathParaPr>
-                      <m:jc m:val="left"/>
-                    </m:oMathParaPr>
-                    <m:oMath>
-                      <m:r>
-                        <a:rPr lang="en-US" i="1" sz="1646">
-                          <a:solidFill>
-                            <a:srgbClr val="111111"/>
-                          </a:solidFill>
-                          <a:latin typeface="Cambria Math"/>
-                          <a:cs typeface="Cambria Math"/>
-                        </a:rPr>
-                        <m:t>p</m:t>
-                      </m:r>
-                      <m:d>
-                        <m:dPr>
-                          <m:begChr m:val="("/>
-                          <m:endChr m:val=")"/>
-                          <m:sepChr m:val=""/>
-                          <m:grow/>
-                        </m:dPr>
-                        <m:e>
-                          <m:sSub>
-                            <m:e>
-                              <m:r>
-                                <a:rPr lang="en-US" i="1" sz="1646">
-                                  <a:solidFill>
-                                    <a:srgbClr val="111111"/>
-                                  </a:solidFill>
-                                  <a:latin typeface="Cambria Math"/>
-                                  <a:cs typeface="Cambria Math"/>
-                                </a:rPr>
-                                <m:t>x</m:t>
-                              </m:r>
-                            </m:e>
-                            <m:sub>
-                              <m:r>
-                                <a:rPr lang="en-US" i="1" sz="1646">
-                                  <a:solidFill>
-                                    <a:srgbClr val="111111"/>
-                                  </a:solidFill>
-                                  <a:latin typeface="Cambria Math"/>
-                                  <a:cs typeface="Cambria Math"/>
-                                </a:rPr>
-                                <m:t>1</m:t>
-                              </m:r>
-                              <m:r>
-                                <m:rPr>
-                                  <m:sty m:val="p"/>
-                                </m:rPr>
-                                <a:rPr lang="en-US" i="1" sz="1646">
-                                  <a:solidFill>
-                                    <a:srgbClr val="111111"/>
-                                  </a:solidFill>
-                                  <a:latin typeface="Cambria Math"/>
-                                  <a:cs typeface="Cambria Math"/>
-                                </a:rPr>
-                                <m:t>:</m:t>
-                              </m:r>
-                              <m:r>
-                                <a:rPr lang="en-US" i="1" sz="1646">
-                                  <a:solidFill>
-                                    <a:srgbClr val="111111"/>
-                                  </a:solidFill>
-                                  <a:latin typeface="Cambria Math"/>
-                                  <a:cs typeface="Cambria Math"/>
-                                </a:rPr>
-                                <m:t>n</m:t>
-                              </m:r>
-                            </m:sub>
-                          </m:sSub>
-                          <m:r>
-                            <m:rPr>
-                              <m:sty m:val="p"/>
-                            </m:rPr>
-                            <a:rPr lang="en-US" i="1" sz="1646">
-                              <a:solidFill>
-                                <a:srgbClr val="111111"/>
-                              </a:solidFill>
-                              <a:latin typeface="Cambria Math"/>
-                              <a:cs typeface="Cambria Math"/>
-                            </a:rPr>
-                            <m:t>∣</m:t>
-                          </m:r>
-                          <m:r>
-                            <a:rPr lang="en-US" i="1" sz="1646">
-                              <a:solidFill>
-                                <a:srgbClr val="111111"/>
-                              </a:solidFill>
-                              <a:latin typeface="Cambria Math"/>
-                              <a:cs typeface="Cambria Math"/>
-                            </a:rPr>
-                            <m:t>k</m:t>
-                          </m:r>
-                        </m:e>
-                      </m:d>
-                      <m:r>
-                        <m:rPr>
-                          <m:sty m:val="p"/>
-                        </m:rPr>
-                        <a:rPr lang="en-US" i="1" sz="1646">
-                          <a:solidFill>
-                            <a:srgbClr val="111111"/>
-                          </a:solidFill>
-                          <a:latin typeface="Cambria Math"/>
-                          <a:cs typeface="Cambria Math"/>
-                        </a:rPr>
-                        <m:t>=</m:t>
-                      </m:r>
-                      <m:r>
-                        <m:rPr>
-                          <m:sty m:val="p"/>
-                        </m:rPr>
-                        <a:rPr lang="en-US" i="1" sz="1646">
-                          <a:solidFill>
-                            <a:srgbClr val="111111"/>
-                          </a:solidFill>
-                          <a:latin typeface="Cambria Math"/>
-                          <a:cs typeface="Cambria Math"/>
-                        </a:rPr>
-                        <m:t>∫</m:t>
-                      </m:r>
-                      <m:nary>
-                        <m:naryPr>
-                          <m:chr m:val="∏"/>
-                          <m:limLoc m:val="undOvr"/>
-                          <m:subHide m:val="off"/>
-                          <m:supHide m:val="off"/>
-                        </m:naryPr>
-                        <m:sub>
-                          <m:r>
-                            <a:rPr lang="en-US" i="1" sz="1646">
-                              <a:solidFill>
-                                <a:srgbClr val="111111"/>
-                              </a:solidFill>
-                              <a:latin typeface="Cambria Math"/>
-                              <a:cs typeface="Cambria Math"/>
-                            </a:rPr>
-                            <m:t>m</m:t>
-                          </m:r>
-                          <m:r>
-                            <m:rPr>
-                              <m:sty m:val="p"/>
-                            </m:rPr>
-                            <a:rPr lang="en-US" i="1" sz="1646">
-                              <a:solidFill>
-                                <a:srgbClr val="111111"/>
-                              </a:solidFill>
-                              <a:latin typeface="Cambria Math"/>
-                              <a:cs typeface="Cambria Math"/>
-                            </a:rPr>
-                            <m:t>=</m:t>
-                          </m:r>
-                          <m:r>
-                            <a:rPr lang="en-US" i="1" sz="1646">
-                              <a:solidFill>
-                                <a:srgbClr val="111111"/>
-                              </a:solidFill>
-                              <a:latin typeface="Cambria Math"/>
-                              <a:cs typeface="Cambria Math"/>
-                            </a:rPr>
-                            <m:t>1</m:t>
-                          </m:r>
-                        </m:sub>
-                        <m:sup>
-                          <m:r>
-                            <a:rPr lang="en-US" i="1" sz="1646">
-                              <a:solidFill>
-                                <a:srgbClr val="111111"/>
-                              </a:solidFill>
-                              <a:latin typeface="Cambria Math"/>
-                              <a:cs typeface="Cambria Math"/>
-                            </a:rPr>
-                            <m:t>7</m:t>
-                          </m:r>
-                        </m:sup>
-                        <m:e>
-                          <m:r>
-                            <m:rPr>
-                              <m:sty m:val="p"/>
-                              <m:scr m:val="script"/>
-                            </m:rPr>
-                            <a:rPr lang="en-US" i="1" sz="1646">
-                              <a:solidFill>
-                                <a:srgbClr val="111111"/>
-                              </a:solidFill>
-                              <a:latin typeface="Cambria Math"/>
-                              <a:cs typeface="Cambria Math"/>
-                            </a:rPr>
-                            <m:t>N</m:t>
-                          </m:r>
-                        </m:e>
-                      </m:nary>
-                      <m:d>
-                        <m:dPr>
-                          <m:begChr m:val="("/>
-                          <m:endChr m:val=")"/>
-                          <m:sepChr m:val=""/>
-                          <m:grow/>
-                        </m:dPr>
-                        <m:e>
-                          <m:sSub>
-                            <m:e>
-                              <m:r>
-                                <a:rPr lang="en-US" i="1" sz="1646">
-                                  <a:solidFill>
-                                    <a:srgbClr val="111111"/>
-                                  </a:solidFill>
-                                  <a:latin typeface="Cambria Math"/>
-                                  <a:cs typeface="Cambria Math"/>
-                                </a:rPr>
-                                <m:t>x</m:t>
-                              </m:r>
-                            </m:e>
-                            <m:sub>
-                              <m:r>
-                                <a:rPr lang="en-US" i="1" sz="1646">
-                                  <a:solidFill>
-                                    <a:srgbClr val="111111"/>
-                                  </a:solidFill>
-                                  <a:latin typeface="Cambria Math"/>
-                                  <a:cs typeface="Cambria Math"/>
-                                </a:rPr>
-                                <m:t>m</m:t>
-                              </m:r>
-                              <m:r>
-                                <m:rPr>
-                                  <m:sty m:val="p"/>
-                                </m:rPr>
-                                <a:rPr lang="en-US" i="1" sz="1646">
-                                  <a:solidFill>
-                                    <a:srgbClr val="111111"/>
-                                  </a:solidFill>
-                                  <a:latin typeface="Cambria Math"/>
-                                  <a:cs typeface="Cambria Math"/>
-                                </a:rPr>
-                                <m:t>,</m:t>
-                              </m:r>
-                              <m:r>
-                                <a:rPr lang="en-US" i="1" sz="1646">
-                                  <a:solidFill>
-                                    <a:srgbClr val="111111"/>
-                                  </a:solidFill>
-                                  <a:latin typeface="Cambria Math"/>
-                                  <a:cs typeface="Cambria Math"/>
-                                </a:rPr>
-                                <m:t>1</m:t>
-                              </m:r>
-                              <m:r>
-                                <m:rPr>
-                                  <m:sty m:val="p"/>
-                                </m:rPr>
-                                <a:rPr lang="en-US" i="1" sz="1646">
-                                  <a:solidFill>
-                                    <a:srgbClr val="111111"/>
-                                  </a:solidFill>
-                                  <a:latin typeface="Cambria Math"/>
-                                  <a:cs typeface="Cambria Math"/>
-                                </a:rPr>
-                                <m:t>:</m:t>
-                              </m:r>
-                              <m:r>
-                                <a:rPr lang="en-US" i="1" sz="1646">
-                                  <a:solidFill>
-                                    <a:srgbClr val="111111"/>
-                                  </a:solidFill>
-                                  <a:latin typeface="Cambria Math"/>
-                                  <a:cs typeface="Cambria Math"/>
-                                </a:rPr>
-                                <m:t>n</m:t>
-                              </m:r>
-                            </m:sub>
-                          </m:sSub>
-                          <m:r>
-                            <m:rPr>
-                              <m:sty m:val="p"/>
-                            </m:rPr>
-                            <a:rPr lang="en-US" i="1" sz="1646">
-                              <a:solidFill>
-                                <a:srgbClr val="111111"/>
-                              </a:solidFill>
-                              <a:latin typeface="Cambria Math"/>
-                              <a:cs typeface="Cambria Math"/>
-                            </a:rPr>
-                            <m:t>∣</m:t>
-                          </m:r>
-                          <m:r>
-                            <a:rPr lang="en-US" i="1" sz="1646">
-                              <a:solidFill>
-                                <a:srgbClr val="111111"/>
-                              </a:solidFill>
-                              <a:latin typeface="Cambria Math"/>
-                              <a:cs typeface="Cambria Math"/>
-                            </a:rPr>
-                            <m:t>s</m:t>
-                          </m:r>
-                          <m:r>
-                            <a:rPr lang="en-US" i="1" sz="1646">
-                              <a:solidFill>
-                                <a:srgbClr val="111111"/>
-                              </a:solidFill>
-                              <a:latin typeface="Cambria Math"/>
-                              <a:cs typeface="Cambria Math"/>
-                            </a:rPr>
-                            <m:t> </m:t>
-                          </m:r>
-                          <m:sSub>
-                            <m:e>
-                              <m:r>
-                                <a:rPr lang="en-US" i="1" sz="1646">
-                                  <a:solidFill>
-                                    <a:srgbClr val="111111"/>
-                                  </a:solidFill>
-                                  <a:latin typeface="Cambria Math"/>
-                                  <a:cs typeface="Cambria Math"/>
-                                </a:rPr>
-                                <m:t>μ</m:t>
-                              </m:r>
-                            </m:e>
-                            <m:sub>
-                              <m:r>
-                                <a:rPr lang="en-US" i="1" sz="1646">
-                                  <a:solidFill>
-                                    <a:srgbClr val="111111"/>
-                                  </a:solidFill>
-                                  <a:latin typeface="Cambria Math"/>
-                                  <a:cs typeface="Cambria Math"/>
-                                </a:rPr>
-                                <m:t>m</m:t>
-                              </m:r>
-                              <m:r>
-                                <m:rPr>
-                                  <m:sty m:val="p"/>
-                                </m:rPr>
-                                <a:rPr lang="en-US" i="1" sz="1646">
-                                  <a:solidFill>
-                                    <a:srgbClr val="111111"/>
-                                  </a:solidFill>
-                                  <a:latin typeface="Cambria Math"/>
-                                  <a:cs typeface="Cambria Math"/>
-                                </a:rPr>
-                                <m:t>,</m:t>
-                              </m:r>
-                              <m:r>
-                                <a:rPr lang="en-US" i="1" sz="1646">
-                                  <a:solidFill>
-                                    <a:srgbClr val="111111"/>
-                                  </a:solidFill>
-                                  <a:latin typeface="Cambria Math"/>
-                                  <a:cs typeface="Cambria Math"/>
-                                </a:rPr>
-                                <m:t>k</m:t>
-                              </m:r>
-                            </m:sub>
-                          </m:sSub>
-                          <m:r>
-                            <m:rPr>
-                              <m:sty m:val="p"/>
-                            </m:rPr>
-                            <a:rPr lang="en-US" i="1" sz="1646">
-                              <a:solidFill>
-                                <a:srgbClr val="111111"/>
-                              </a:solidFill>
-                              <a:latin typeface="Cambria Math"/>
-                              <a:cs typeface="Cambria Math"/>
-                            </a:rPr>
-                            <m:t>,</m:t>
-                          </m:r>
-                          <m:r>
-                            <a:rPr lang="en-US" i="1" sz="1646">
-                              <a:solidFill>
-                                <a:srgbClr val="111111"/>
-                              </a:solidFill>
-                              <a:latin typeface="Cambria Math"/>
-                              <a:cs typeface="Cambria Math"/>
-                            </a:rPr>
-                            <m:t> </m:t>
-                          </m:r>
-                          <m:sSub>
-                            <m:e>
-                              <m:r>
-                                <a:rPr lang="en-US" i="1" sz="1646">
-                                  <a:solidFill>
-                                    <a:srgbClr val="111111"/>
-                                  </a:solidFill>
-                                  <a:latin typeface="Cambria Math"/>
-                                  <a:cs typeface="Cambria Math"/>
-                                </a:rPr>
-                                <m:t>Σ</m:t>
-                              </m:r>
-                            </m:e>
-                            <m:sub>
-                              <m:r>
-                                <a:rPr lang="en-US" i="1" sz="1646">
-                                  <a:solidFill>
-                                    <a:srgbClr val="111111"/>
-                                  </a:solidFill>
-                                  <a:latin typeface="Cambria Math"/>
-                                  <a:cs typeface="Cambria Math"/>
-                                </a:rPr>
-                                <m:t>m</m:t>
-                              </m:r>
-                              <m:r>
-                                <m:rPr>
-                                  <m:sty m:val="p"/>
-                                </m:rPr>
-                                <a:rPr lang="en-US" i="1" sz="1646">
-                                  <a:solidFill>
-                                    <a:srgbClr val="111111"/>
-                                  </a:solidFill>
-                                  <a:latin typeface="Cambria Math"/>
-                                  <a:cs typeface="Cambria Math"/>
-                                </a:rPr>
-                                <m:t>,</m:t>
-                              </m:r>
-                              <m:r>
-                                <a:rPr lang="en-US" i="1" sz="1646">
-                                  <a:solidFill>
-                                    <a:srgbClr val="111111"/>
-                                  </a:solidFill>
-                                  <a:latin typeface="Cambria Math"/>
-                                  <a:cs typeface="Cambria Math"/>
-                                </a:rPr>
-                                <m:t>k</m:t>
-                              </m:r>
-                            </m:sub>
-                          </m:sSub>
-                          <m:d>
-                            <m:dPr>
-                              <m:begChr m:val="("/>
-                              <m:endChr m:val=")"/>
-                              <m:sepChr m:val=""/>
-                              <m:grow/>
-                            </m:dPr>
-                            <m:e>
-                              <m:r>
-                                <a:rPr lang="en-US" i="1" sz="1646">
-                                  <a:solidFill>
-                                    <a:srgbClr val="111111"/>
-                                  </a:solidFill>
-                                  <a:latin typeface="Cambria Math"/>
-                                  <a:cs typeface="Cambria Math"/>
-                                </a:rPr>
-                                <m:t>s</m:t>
-                              </m:r>
-                            </m:e>
-                          </m:d>
-                        </m:e>
-                      </m:d>
-                      <m:r>
-                        <a:rPr lang="en-US" i="1" sz="1646">
-                          <a:solidFill>
-                            <a:srgbClr val="111111"/>
-                          </a:solidFill>
-                          <a:latin typeface="Cambria Math"/>
-                          <a:cs typeface="Cambria Math"/>
-                        </a:rPr>
-                        <m:t> </m:t>
-                      </m:r>
-                      <m:r>
-                        <a:rPr lang="en-US" i="1" sz="1646">
-                          <a:solidFill>
-                            <a:srgbClr val="111111"/>
-                          </a:solidFill>
-                          <a:latin typeface="Cambria Math"/>
-                          <a:cs typeface="Cambria Math"/>
-                        </a:rPr>
-                        <m:t>p</m:t>
-                      </m:r>
-                      <m:d>
-                        <m:dPr>
-                          <m:begChr m:val="("/>
-                          <m:endChr m:val=")"/>
-                          <m:sepChr m:val=""/>
-                          <m:grow/>
-                        </m:dPr>
-                        <m:e>
-                          <m:r>
-                            <a:rPr lang="en-US" i="1" sz="1646">
-                              <a:solidFill>
-                                <a:srgbClr val="111111"/>
-                              </a:solidFill>
-                              <a:latin typeface="Cambria Math"/>
-                              <a:cs typeface="Cambria Math"/>
-                            </a:rPr>
-                            <m:t>s</m:t>
-                          </m:r>
-                        </m:e>
-                      </m:d>
-                      <m:r>
-                        <a:rPr lang="en-US" i="1" sz="1646">
-                          <a:solidFill>
-                            <a:srgbClr val="111111"/>
-                          </a:solidFill>
-                          <a:latin typeface="Cambria Math"/>
-                          <a:cs typeface="Cambria Math"/>
-                        </a:rPr>
-                        <m:t> </m:t>
-                      </m:r>
-                      <m:r>
-                        <a:rPr lang="en-US" i="1" sz="1646">
-                          <a:solidFill>
-                            <a:srgbClr val="111111"/>
-                          </a:solidFill>
-                          <a:latin typeface="Cambria Math"/>
-                          <a:cs typeface="Cambria Math"/>
-                        </a:rPr>
-                        <m:t>d</m:t>
-                      </m:r>
-                      <m:r>
-                        <a:rPr lang="en-US" i="1" sz="1646">
-                          <a:solidFill>
-                            <a:srgbClr val="111111"/>
-                          </a:solidFill>
-                          <a:latin typeface="Cambria Math"/>
-                          <a:cs typeface="Cambria Math"/>
-                        </a:rPr>
-                        <m:t>s</m:t>
-                      </m:r>
-                    </m:oMath>
-                  </m:oMathPara>
-                </a14:m>
-                <a:endParaRPr lang="en-US" sz="1646"/>
-              </a:p>
-            </p:txBody>
-          </p:sp>
-        </mc:Choice>
-        <mc:Fallback>
-          <p:sp>
-            <p:nvSpPr>
-              <p:cNvPr id="5" name="Equation: likelihood" descr="LaTeX: p(x_{1:n} \mid k) = \int \prod_{m=1}^{7} \mathcal{N}\left(x_{m,1:n} \mid s\,\mu_{m,k},\;\Sigma_{m,k}(s)\right)\, p(s)\, ds"/>
-              <p:cNvSpPr txBox="1">
-                <a:spLocks noRot="1" noChangeAspect="1" noMove="1" noResize="1" noEditPoints="1" noAdjustHandles="1" noChangeArrowheads="1" noChangeShapeType="1" noTextEdit="1"/>
-              </p:cNvSpPr>
-              <p:nvPr/>
-            </p:nvSpPr>
-            <p:spPr>
-              <a:xfrm>
-                <a:off x="1750161" y="3413760"/>
-                <a:ext cx="4811342" cy="619604"/>
-              </a:xfrm>
-              <a:prstGeom prst="rect">
-                <a:avLst/>
-              </a:prstGeom>
-              <a:blipFill>
-                <a:blip r:embed="rId3"/>
-                <a:stretch>
-                  <a:fillRect/>
-                </a:stretch>
-              </a:blipFill>
-            </p:spPr>
-            <p:txBody>
-              <a:bodyPr/>
-              <a:lstStyle/>
-              <a:p>
-                <a:r>
-                  <a:rPr lang="en-US">
-                    <a:noFill/>
-                  </a:rPr>
-                  <a:t> </a:t>
-                </a:r>
-              </a:p>
-            </p:txBody>
-          </p:sp>
-        </mc:Fallback>
-      </mc:AlternateContent>
-      <p:sp>
-        <p:nvSpPr>
-          <p:cNvPr id="6" name="Text: how"/>
+              <a:t>Fields centred on T12 in synthetic columns, named exactly:</a:t>
+            </a:r>
+          </a:p>
+        </p:txBody>
+      </p:sp>
+      <p:sp>
+        <p:nvSpPr>
+          <p:cNvPr id="4" name="Text: stat T12 1"/>
           <p:cNvSpPr txBox="1"/>
           <p:nvPr/>
         </p:nvSpPr>
         <p:spPr>
           <a:xfrm>
-            <a:off x="1750161" y="4216244"/>
-            <a:ext cx="4811342" cy="2001676"/>
+            <a:off x="1750161" y="2331720"/>
+            <a:ext cx="4727666" cy="868680"/>
           </a:xfrm>
           <a:prstGeom prst="rect">
             <a:avLst/>
@@ -4378,100 +2704,215 @@
           <a:lstStyle/>
           <a:p>
             <a:pPr algn="l">
-              <a:spcAft>
-                <a:spcPts val="800"/>
-              </a:spcAft>
-            </a:pPr>
-            <a:r>
-              <a:rPr sz="1500" b="0" i="0">
+              <a:lnSpc>
+                <a:spcPct val="95000"/>
+              </a:lnSpc>
+              <a:spcAft>
+                <a:spcPts val="100"/>
+              </a:spcAft>
+            </a:pPr>
+            <a:r>
+              <a:rPr sz="3600" b="1" i="0">
+                <a:solidFill>
+                  <a:srgbClr val="1B4F8C"/>
+                </a:solidFill>
+                <a:latin typeface="Cambria"/>
+              </a:rPr>
+              <a:t>39%</a:t>
+            </a:r>
+          </a:p>
+          <a:p>
+            <a:pPr algn="l">
+              <a:lnSpc>
+                <a:spcPct val="95000"/>
+              </a:lnSpc>
+              <a:spcAft>
+                <a:spcPts val="100"/>
+              </a:spcAft>
+            </a:pPr>
+            <a:r>
+              <a:rPr sz="1600" b="0" i="0">
                 <a:solidFill>
                   <a:srgbClr val="111111"/>
                 </a:solidFill>
                 <a:latin typeface="Cambria"/>
               </a:rPr>
-              <a:t>Every place is scored; nothing is fitted.</a:t>
-            </a:r>
-          </a:p>
+              <a:t>from one body</a:t>
+            </a:r>
+          </a:p>
+        </p:txBody>
+      </p:sp>
+      <p:sp>
+        <p:nvSpPr>
+          <p:cNvPr id="5" name="Text: stat T12 3"/>
+          <p:cNvSpPr txBox="1"/>
+          <p:nvPr/>
+        </p:nvSpPr>
+        <p:spPr>
+          <a:xfrm>
+            <a:off x="1750161" y="3246120"/>
+            <a:ext cx="4727666" cy="868680"/>
+          </a:xfrm>
+          <a:prstGeom prst="rect">
+            <a:avLst/>
+          </a:prstGeom>
+          <a:noFill/>
+        </p:spPr>
+        <p:txBody>
+          <a:bodyPr wrap="square" anchor="t" lIns="18288" rIns="18288" tIns="18288" bIns="18288">
+            <a:spAutoFit/>
+          </a:bodyPr>
+          <a:lstStyle/>
           <a:p>
             <a:pPr algn="l">
-              <a:spcAft>
-                <a:spcPts val="800"/>
-              </a:spcAft>
-            </a:pPr>
-            <a:r>
-              <a:rPr sz="1500" b="0" i="0">
+              <a:lnSpc>
+                <a:spcPct val="95000"/>
+              </a:lnSpc>
+              <a:spcAft>
+                <a:spcPts val="100"/>
+              </a:spcAft>
+            </a:pPr>
+            <a:r>
+              <a:rPr sz="3600" b="1" i="0">
+                <a:solidFill>
+                  <a:srgbClr val="1B4F8C"/>
+                </a:solidFill>
+                <a:latin typeface="Cambria"/>
+              </a:rPr>
+              <a:t>73%</a:t>
+            </a:r>
+          </a:p>
+          <a:p>
+            <a:pPr algn="l">
+              <a:lnSpc>
+                <a:spcPct val="95000"/>
+              </a:lnSpc>
+              <a:spcAft>
+                <a:spcPts val="100"/>
+              </a:spcAft>
+            </a:pPr>
+            <a:r>
+              <a:rPr sz="1600" b="0" i="0">
                 <a:solidFill>
                   <a:srgbClr val="111111"/>
                 </a:solidFill>
                 <a:latin typeface="Cambria"/>
               </a:rPr>
-              <a:t>Given the patient's size </a:t>
-            </a:r>
-            <a:r>
-              <a:rPr sz="1500" b="0" i="1">
+              <a:t>from three bodies</a:t>
+            </a:r>
+          </a:p>
+        </p:txBody>
+      </p:sp>
+      <p:sp>
+        <p:nvSpPr>
+          <p:cNvPr id="6" name="Text: stat T12 9"/>
+          <p:cNvSpPr txBox="1"/>
+          <p:nvPr/>
+        </p:nvSpPr>
+        <p:spPr>
+          <a:xfrm>
+            <a:off x="1750161" y="4160520"/>
+            <a:ext cx="4727666" cy="868680"/>
+          </a:xfrm>
+          <a:prstGeom prst="rect">
+            <a:avLst/>
+          </a:prstGeom>
+          <a:noFill/>
+        </p:spPr>
+        <p:txBody>
+          <a:bodyPr wrap="square" anchor="t" lIns="18288" rIns="18288" tIns="18288" bIns="18288">
+            <a:spAutoFit/>
+          </a:bodyPr>
+          <a:lstStyle/>
+          <a:p>
+            <a:pPr algn="l">
+              <a:lnSpc>
+                <a:spcPct val="95000"/>
+              </a:lnSpc>
+              <a:spcAft>
+                <a:spcPts val="100"/>
+              </a:spcAft>
+            </a:pPr>
+            <a:r>
+              <a:rPr sz="3600" b="1" i="0">
+                <a:solidFill>
+                  <a:srgbClr val="1B4F8C"/>
+                </a:solidFill>
+                <a:latin typeface="Cambria"/>
+              </a:rPr>
+              <a:t>95%</a:t>
+            </a:r>
+          </a:p>
+          <a:p>
+            <a:pPr algn="l">
+              <a:lnSpc>
+                <a:spcPct val="95000"/>
+              </a:lnSpc>
+              <a:spcAft>
+                <a:spcPts val="100"/>
+              </a:spcAft>
+            </a:pPr>
+            <a:r>
+              <a:rPr sz="1600" b="0" i="0">
                 <a:solidFill>
                   <a:srgbClr val="111111"/>
                 </a:solidFill>
                 <a:latin typeface="Cambria"/>
               </a:rPr>
-              <a:t>s</a:t>
-            </a:r>
-            <a:r>
-              <a:rPr sz="1500" b="0" i="0">
+              <a:t>from nine bodies</a:t>
+            </a:r>
+          </a:p>
+        </p:txBody>
+      </p:sp>
+      <p:sp>
+        <p:nvSpPr>
+          <p:cNvPr id="7" name="Text: ceiling"/>
+          <p:cNvSpPr txBox="1"/>
+          <p:nvPr/>
+        </p:nvSpPr>
+        <p:spPr>
+          <a:xfrm>
+            <a:off x="1750161" y="5166360"/>
+            <a:ext cx="4727666" cy="1005840"/>
+          </a:xfrm>
+          <a:prstGeom prst="rect">
+            <a:avLst/>
+          </a:prstGeom>
+          <a:noFill/>
+        </p:spPr>
+        <p:txBody>
+          <a:bodyPr wrap="square" anchor="t" lIns="18288" rIns="18288" tIns="18288" bIns="18288">
+            <a:spAutoFit/>
+          </a:bodyPr>
+          <a:lstStyle/>
+          <a:p>
+            <a:pPr algn="l">
+              <a:spcAft>
+                <a:spcPts val="600"/>
+              </a:spcAft>
+            </a:pPr>
+            <a:r>
+              <a:rPr sz="1600" b="0" i="0">
                 <a:solidFill>
                   <a:srgbClr val="111111"/>
                 </a:solidFill>
                 <a:latin typeface="Cambria"/>
               </a:rPr>
-              <a:t>, each measure's values are Gaussian with a diagonal-plus-rank-one covariance, inverted in closed form; </a:t>
-            </a:r>
-            <a:r>
-              <a:rPr sz="1500" b="0" i="1">
-                <a:solidFill>
-                  <a:srgbClr val="111111"/>
-                </a:solidFill>
-                <a:latin typeface="Cambria"/>
-              </a:rPr>
-              <a:t>log s</a:t>
-            </a:r>
-            <a:r>
-              <a:rPr sz="1500" b="0" i="0">
-                <a:solidFill>
-                  <a:srgbClr val="111111"/>
-                </a:solidFill>
-                <a:latin typeface="Cambria"/>
-              </a:rPr>
-              <a:t> ~ N(0, 0.07²) is integrated by 161-node Gauss–Hermite quadrature.</a:t>
-            </a:r>
-          </a:p>
-          <a:p>
-            <a:pPr algn="l">
-              <a:spcAft>
-                <a:spcPts val="800"/>
-              </a:spcAft>
-            </a:pPr>
-            <a:r>
-              <a:rPr sz="1500" b="0" i="0">
-                <a:solidFill>
-                  <a:srgbClr val="111111"/>
-                </a:solidFill>
-                <a:latin typeface="Cambria"/>
-              </a:rPr>
-              <a:t>So it is the Bayes rule for this generator: no formula or network on the same measures names more fields correctly on average.</a:t>
+              <a:t>No formula or network on these measures names more fields correctly on average.</a:t>
             </a:r>
           </a:p>
         </p:txBody>
       </p:sp>
       <p:pic>
         <p:nvPicPr>
-          <p:cNvPr id="7" name="Figure: exact_slide_posterior" descr="Bayes' rule over every place. Top, the prior over the middle body's level; below, its posterior from one, three and nine bodies centred on T12, for the scoring column whose three-body posterior at T12 is the median of 2000. Uniform prior, so the posterior is the normalised likelihood. Synthetic columns."/>
+          <p:cNvPr id="8" name="Figure: exact_slide_posterior" descr="Probability of each level for the middle body, every level equally likely before looking, then from one, three and nine bodies centred on T12, for the synthetic column nearest the median of 2,000 at all three widths."/>
           <p:cNvPicPr>
             <a:picLocks noChangeAspect="1"/>
           </p:cNvPicPr>
           <p:nvPr/>
         </p:nvPicPr>
         <p:blipFill>
-          <a:blip r:embed="rId4"/>
+          <a:blip r:embed="rId2"/>
           <a:stretch>
             <a:fillRect/>
           </a:stretch>
@@ -4479,7 +2920,7 @@
         <p:spPr>
           <a:xfrm>
             <a:off x="6645179" y="1371600"/>
-            <a:ext cx="5271557" cy="4392964"/>
+            <a:ext cx="5276088" cy="4389120"/>
           </a:xfrm>
           <a:prstGeom prst="rect">
             <a:avLst/>
@@ -4488,14 +2929,14 @@
       </p:pic>
       <p:sp>
         <p:nvSpPr>
-          <p:cNvPr id="8" name="Text: citation"/>
+          <p:cNvPr id="9" name="Text: footer"/>
           <p:cNvSpPr txBox="1"/>
           <p:nvPr/>
         </p:nvSpPr>
         <p:spPr>
           <a:xfrm>
-            <a:off x="1750161" y="6327648"/>
-            <a:ext cx="8869604" cy="365760"/>
+            <a:off x="1750161" y="6272784"/>
+            <a:ext cx="9120631" cy="411480"/>
           </a:xfrm>
           <a:prstGeom prst="rect">
             <a:avLst/>
@@ -4514,27 +2955,43 @@
               </a:spcAft>
             </a:pPr>
             <a:r>
-              <a:rPr sz="900" b="0" i="0">
+              <a:rPr sz="1100" b="0" i="0">
                 <a:solidFill>
                   <a:srgbClr val="595959"/>
                 </a:solidFill>
                 <a:latin typeface="Cambria"/>
               </a:rPr>
-              <a:t>Synthetic columns drawn from Panjabi's published means and spreads (Spine 1991;16:861, 888; 1992;17:299); no patient data. Retrospective modelling, 2026.</a:t>
-            </a:r>
-          </a:p>
-        </p:txBody>
-      </p:sp>
-      <p:sp>
-        <p:nvSpPr>
-          <p:cNvPr id="9" name="Text: slide number"/>
+              <a:t>Synthetic columns from Panjabi's published tables (Spine 1991;16:861, 888; 1992;17:299); no patient data.</a:t>
+            </a:r>
+          </a:p>
+          <a:p>
+            <a:pPr algn="l">
+              <a:spcAft>
+                <a:spcPts val="0"/>
+              </a:spcAft>
+            </a:pPr>
+            <a:r>
+              <a:rPr sz="1100" b="1" i="0">
+                <a:solidFill>
+                  <a:srgbClr val="111111"/>
+                </a:solidFill>
+                <a:latin typeface="Cambria"/>
+              </a:rPr>
+              <a:t>Confidential: pre-filing draft, not for distribution</a:t>
+            </a:r>
+          </a:p>
+        </p:txBody>
+      </p:sp>
+      <p:sp>
+        <p:nvSpPr>
+          <p:cNvPr id="10" name="Text: slide number"/>
           <p:cNvSpPr txBox="1"/>
           <p:nvPr/>
         </p:nvSpPr>
         <p:spPr>
           <a:xfrm>
-            <a:off x="11063246" y="6327648"/>
-            <a:ext cx="836755" cy="365760"/>
+            <a:off x="11063246" y="6272784"/>
+            <a:ext cx="836755" cy="274320"/>
           </a:xfrm>
           <a:prstGeom prst="rect">
             <a:avLst/>
@@ -4553,7 +3010,7 @@
               </a:spcAft>
             </a:pPr>
             <a:r>
-              <a:rPr sz="900" b="0" i="0">
+              <a:rPr sz="1100" b="0" i="0">
                 <a:solidFill>
                   <a:srgbClr val="595959"/>
                 </a:solidFill>
@@ -4610,14 +3067,14 @@
                 </a:solidFill>
                 <a:latin typeface="Cambria"/>
               </a:rPr>
-              <a:t>Three bodies name 73% exactly; when sure, the name is right 99.8%</a:t>
+              <a:t>Three bodies name 73%; when sure, 99.8% are right</a:t>
             </a:r>
           </a:p>
         </p:txBody>
       </p:sp>
       <p:pic>
         <p:nvPicPr>
-          <p:cNvPr id="3" name="Figure: exact_slide_ceiling" descr="Share of fields named exactly by the exact rule (solid) and named at posterior 0.99 (dashed), both planes, by consecutive bodies in view; crosses, a linear classifier fitted on other synthetic columns, scored on the first 1,000. 2000 synthetic columns."/>
+          <p:cNvPr id="3" name="Figure: exact_slide_ceiling" descr="Share of fields named exactly (solid) and named at 99% confidence (dashed), both planes, by consecutive bodies in view; crosses, a linear classifier fitted on other synthetic columns, scored on the first 1,000. 2,000 synthetic columns."/>
           <p:cNvPicPr>
             <a:picLocks noChangeAspect="1"/>
           </p:cNvPicPr>
@@ -4632,47 +3089,23 @@
         <p:spPr>
           <a:xfrm>
             <a:off x="1750161" y="1325880"/>
-            <a:ext cx="4685828" cy="3472533"/>
+            <a:ext cx="6309360" cy="4297680"/>
           </a:xfrm>
           <a:prstGeom prst="rect">
             <a:avLst/>
           </a:prstGeom>
         </p:spPr>
       </p:pic>
-      <p:pic>
-        <p:nvPicPr>
-          <p:cNvPr id="4" name="Figure: exact_slide_calibration" descr="The posterior is the chance of being right: error the posterior predicts against error counted, by posterior bin, one, three and nine bodies, both planes; dotted, exact agreement; a bin with no error counted sits on the floor. 2000 synthetic columns."/>
-          <p:cNvPicPr>
-            <a:picLocks noChangeAspect="1"/>
-          </p:cNvPicPr>
-          <p:nvPr/>
-        </p:nvPicPr>
-        <p:blipFill>
-          <a:blip r:embed="rId3"/>
-          <a:stretch>
-            <a:fillRect/>
-          </a:stretch>
-        </p:blipFill>
-        <p:spPr>
-          <a:xfrm>
-            <a:off x="6477828" y="1371600"/>
-            <a:ext cx="3054156" cy="3012318"/>
-          </a:xfrm>
-          <a:prstGeom prst="rect">
-            <a:avLst/>
-          </a:prstGeom>
-        </p:spPr>
-      </p:pic>
-      <p:sp>
-        <p:nvSpPr>
-          <p:cNvPr id="5" name="Text: stat three bodies"/>
+      <p:sp>
+        <p:nvSpPr>
+          <p:cNvPr id="4" name="Text: stat three bodies"/>
           <p:cNvSpPr txBox="1"/>
           <p:nvPr/>
         </p:nvSpPr>
         <p:spPr>
           <a:xfrm>
-            <a:off x="9657497" y="1371600"/>
-            <a:ext cx="2242503" cy="1051560"/>
+            <a:off x="8276851" y="1371600"/>
+            <a:ext cx="3598047" cy="1234440"/>
           </a:xfrm>
           <a:prstGeom prst="rect">
             <a:avLst/>
@@ -4700,7 +3133,7 @@
                 </a:solidFill>
                 <a:latin typeface="Cambria"/>
               </a:rPr>
-              <a:t>73.1%</a:t>
+              <a:t>73%</a:t>
             </a:r>
           </a:p>
           <a:p>
@@ -4719,21 +3152,21 @@
                 </a:solidFill>
                 <a:latin typeface="Cambria"/>
               </a:rPr>
-              <a:t>of three-body fields named exactly (a fitted classifier: 58.2%)</a:t>
-            </a:r>
-          </a:p>
-        </p:txBody>
-      </p:sp>
-      <p:sp>
-        <p:nvSpPr>
-          <p:cNvPr id="6" name="Text: stat precision"/>
+              <a:t>of three-body fields named exactly (a linear classifier: 58.2%; a fitted network: 71.6%)</a:t>
+            </a:r>
+          </a:p>
+        </p:txBody>
+      </p:sp>
+      <p:sp>
+        <p:nvSpPr>
+          <p:cNvPr id="5" name="Text: stat precision"/>
           <p:cNvSpPr txBox="1"/>
           <p:nvPr/>
         </p:nvSpPr>
         <p:spPr>
           <a:xfrm>
-            <a:off x="9657497" y="2606040"/>
-            <a:ext cx="2242503" cy="1051560"/>
+            <a:off x="8276851" y="2651760"/>
+            <a:ext cx="3598047" cy="1234440"/>
           </a:xfrm>
           <a:prstGeom prst="rect">
             <a:avLst/>
@@ -4761,7 +3194,7 @@
                 </a:solidFill>
                 <a:latin typeface="Cambria"/>
               </a:rPr>
-              <a:t>99.78%</a:t>
+              <a:t>99.8%</a:t>
             </a:r>
           </a:p>
           <a:p>
@@ -4780,21 +3213,21 @@
                 </a:solidFill>
                 <a:latin typeface="Cambria"/>
               </a:rPr>
-              <a:t>of names given at posterior 0.99 right (15 wrong of 6,848)</a:t>
-            </a:r>
-          </a:p>
-        </p:txBody>
-      </p:sp>
-      <p:sp>
-        <p:nvSpPr>
-          <p:cNvPr id="7" name="Text: stat nine bodies"/>
+              <a:t>of three-body names given at 99% confidence right (15 wrong of 6,848; named for 17% of fields)</a:t>
+            </a:r>
+          </a:p>
+        </p:txBody>
+      </p:sp>
+      <p:sp>
+        <p:nvSpPr>
+          <p:cNvPr id="6" name="Text: stat nine bodies"/>
           <p:cNvSpPr txBox="1"/>
           <p:nvPr/>
         </p:nvSpPr>
         <p:spPr>
           <a:xfrm>
-            <a:off x="9657497" y="3840480"/>
-            <a:ext cx="2242503" cy="1051560"/>
+            <a:off x="8276851" y="3931920"/>
+            <a:ext cx="3598047" cy="822960"/>
           </a:xfrm>
           <a:prstGeom prst="rect">
             <a:avLst/>
@@ -4822,7 +3255,7 @@
                 </a:solidFill>
                 <a:latin typeface="Cambria"/>
               </a:rPr>
-              <a:t>96.1%</a:t>
+              <a:t>96%</a:t>
             </a:r>
           </a:p>
           <a:p>
@@ -4846,409 +3279,16 @@
           </a:p>
         </p:txBody>
       </p:sp>
-      <mc:AlternateContent xmlns:mc="http://schemas.openxmlformats.org/markup-compatibility/2006">
-        <mc:Choice xmlns:a14="http://schemas.microsoft.com/office/drawing/2010/main" Requires="a14">
-          <p:sp>
-            <p:nvSpPr>
-              <p:cNvPr id="8" name="Equation: selective" descr="LaTeX: \Pr\left(\hat{k} = k \mid \hat{p} \geq 1-\varepsilon\right) = \mathbb{E}\left[\hat{p} \mid \hat{p} \geq 1-\varepsilon\right] \geq 1-\varepsilon"/>
-              <p:cNvSpPr txBox="1"/>
-              <p:nvPr/>
-            </p:nvSpPr>
-            <p:spPr>
-              <a:xfrm>
-                <a:off x="1750161" y="5230368"/>
-                <a:ext cx="4532376" cy="338328"/>
-              </a:xfrm>
-              <a:prstGeom prst="rect">
-                <a:avLst/>
-              </a:prstGeom>
-              <a:noFill/>
-            </p:spPr>
-            <p:txBody>
-              <a:bodyPr wrap="none" lIns="0" tIns="0" rIns="0" bIns="0" anchor="ctr">
-                <a:noAutofit/>
-              </a:bodyPr>
-              <a:lstStyle/>
-              <a:p>
-                <a:pPr algn="l"/>
-                <a14:m>
-                  <m:oMathPara xmlns:m="http://schemas.openxmlformats.org/officeDocument/2006/math">
-                    <m:oMathParaPr>
-                      <m:jc m:val="left"/>
-                    </m:oMathParaPr>
-                    <m:oMath>
-                      <m:r>
-                        <m:rPr>
-                          <m:sty m:val="p"/>
-                        </m:rPr>
-                        <a:rPr lang="en-US" i="1" sz="1800">
-                          <a:solidFill>
-                            <a:srgbClr val="111111"/>
-                          </a:solidFill>
-                          <a:latin typeface="Cambria Math"/>
-                          <a:cs typeface="Cambria Math"/>
-                        </a:rPr>
-                        <m:t>Pr</m:t>
-                      </m:r>
-                      <m:d>
-                        <m:dPr>
-                          <m:begChr m:val="("/>
-                          <m:endChr m:val=")"/>
-                          <m:sepChr m:val=""/>
-                          <m:grow/>
-                        </m:dPr>
-                        <m:e>
-                          <m:acc>
-                            <m:accPr>
-                              <m:chr m:val="̂"/>
-                            </m:accPr>
-                            <m:e>
-                              <m:r>
-                                <a:rPr lang="en-US" i="1" sz="1800">
-                                  <a:solidFill>
-                                    <a:srgbClr val="111111"/>
-                                  </a:solidFill>
-                                  <a:latin typeface="Cambria Math"/>
-                                  <a:cs typeface="Cambria Math"/>
-                                </a:rPr>
-                                <m:t>k</m:t>
-                              </m:r>
-                            </m:e>
-                          </m:acc>
-                          <m:r>
-                            <m:rPr>
-                              <m:sty m:val="p"/>
-                            </m:rPr>
-                            <a:rPr lang="en-US" i="1" sz="1800">
-                              <a:solidFill>
-                                <a:srgbClr val="111111"/>
-                              </a:solidFill>
-                              <a:latin typeface="Cambria Math"/>
-                              <a:cs typeface="Cambria Math"/>
-                            </a:rPr>
-                            <m:t>=</m:t>
-                          </m:r>
-                          <m:r>
-                            <a:rPr lang="en-US" i="1" sz="1800">
-                              <a:solidFill>
-                                <a:srgbClr val="111111"/>
-                              </a:solidFill>
-                              <a:latin typeface="Cambria Math"/>
-                              <a:cs typeface="Cambria Math"/>
-                            </a:rPr>
-                            <m:t>k</m:t>
-                          </m:r>
-                          <m:r>
-                            <m:rPr>
-                              <m:sty m:val="p"/>
-                            </m:rPr>
-                            <a:rPr lang="en-US" i="1" sz="1800">
-                              <a:solidFill>
-                                <a:srgbClr val="111111"/>
-                              </a:solidFill>
-                              <a:latin typeface="Cambria Math"/>
-                              <a:cs typeface="Cambria Math"/>
-                            </a:rPr>
-                            <m:t>∣</m:t>
-                          </m:r>
-                          <m:acc>
-                            <m:accPr>
-                              <m:chr m:val="̂"/>
-                            </m:accPr>
-                            <m:e>
-                              <m:r>
-                                <a:rPr lang="en-US" i="1" sz="1800">
-                                  <a:solidFill>
-                                    <a:srgbClr val="111111"/>
-                                  </a:solidFill>
-                                  <a:latin typeface="Cambria Math"/>
-                                  <a:cs typeface="Cambria Math"/>
-                                </a:rPr>
-                                <m:t>p</m:t>
-                              </m:r>
-                            </m:e>
-                          </m:acc>
-                          <m:r>
-                            <m:rPr>
-                              <m:sty m:val="p"/>
-                            </m:rPr>
-                            <a:rPr lang="en-US" i="1" sz="1800">
-                              <a:solidFill>
-                                <a:srgbClr val="111111"/>
-                              </a:solidFill>
-                              <a:latin typeface="Cambria Math"/>
-                              <a:cs typeface="Cambria Math"/>
-                            </a:rPr>
-                            <m:t>≥</m:t>
-                          </m:r>
-                          <m:r>
-                            <a:rPr lang="en-US" i="1" sz="1800">
-                              <a:solidFill>
-                                <a:srgbClr val="111111"/>
-                              </a:solidFill>
-                              <a:latin typeface="Cambria Math"/>
-                              <a:cs typeface="Cambria Math"/>
-                            </a:rPr>
-                            <m:t>1</m:t>
-                          </m:r>
-                          <m:r>
-                            <m:rPr>
-                              <m:sty m:val="p"/>
-                            </m:rPr>
-                            <a:rPr lang="en-US" i="1" sz="1800">
-                              <a:solidFill>
-                                <a:srgbClr val="111111"/>
-                              </a:solidFill>
-                              <a:latin typeface="Cambria Math"/>
-                              <a:cs typeface="Cambria Math"/>
-                            </a:rPr>
-                            <m:t>−</m:t>
-                          </m:r>
-                          <m:r>
-                            <a:rPr lang="en-US" i="1" sz="1800">
-                              <a:solidFill>
-                                <a:srgbClr val="111111"/>
-                              </a:solidFill>
-                              <a:latin typeface="Cambria Math"/>
-                              <a:cs typeface="Cambria Math"/>
-                            </a:rPr>
-                            <m:t>ε</m:t>
-                          </m:r>
-                        </m:e>
-                      </m:d>
-                      <m:r>
-                        <m:rPr>
-                          <m:sty m:val="p"/>
-                        </m:rPr>
-                        <a:rPr lang="en-US" i="1" sz="1800">
-                          <a:solidFill>
-                            <a:srgbClr val="111111"/>
-                          </a:solidFill>
-                          <a:latin typeface="Cambria Math"/>
-                          <a:cs typeface="Cambria Math"/>
-                        </a:rPr>
-                        <m:t>=</m:t>
-                      </m:r>
-                      <m:r>
-                        <m:rPr>
-                          <m:sty m:val="p"/>
-                          <m:scr m:val="double-struck"/>
-                        </m:rPr>
-                        <a:rPr lang="en-US" i="1" sz="1800">
-                          <a:solidFill>
-                            <a:srgbClr val="111111"/>
-                          </a:solidFill>
-                          <a:latin typeface="Cambria Math"/>
-                          <a:cs typeface="Cambria Math"/>
-                        </a:rPr>
-                        <m:t>E</m:t>
-                      </m:r>
-                      <m:d>
-                        <m:dPr>
-                          <m:begChr m:val="["/>
-                          <m:endChr m:val="]"/>
-                          <m:sepChr m:val=""/>
-                          <m:grow/>
-                        </m:dPr>
-                        <m:e>
-                          <m:acc>
-                            <m:accPr>
-                              <m:chr m:val="̂"/>
-                            </m:accPr>
-                            <m:e>
-                              <m:r>
-                                <a:rPr lang="en-US" i="1" sz="1800">
-                                  <a:solidFill>
-                                    <a:srgbClr val="111111"/>
-                                  </a:solidFill>
-                                  <a:latin typeface="Cambria Math"/>
-                                  <a:cs typeface="Cambria Math"/>
-                                </a:rPr>
-                                <m:t>p</m:t>
-                              </m:r>
-                            </m:e>
-                          </m:acc>
-                          <m:r>
-                            <m:rPr>
-                              <m:sty m:val="p"/>
-                            </m:rPr>
-                            <a:rPr lang="en-US" i="1" sz="1800">
-                              <a:solidFill>
-                                <a:srgbClr val="111111"/>
-                              </a:solidFill>
-                              <a:latin typeface="Cambria Math"/>
-                              <a:cs typeface="Cambria Math"/>
-                            </a:rPr>
-                            <m:t>∣</m:t>
-                          </m:r>
-                          <m:acc>
-                            <m:accPr>
-                              <m:chr m:val="̂"/>
-                            </m:accPr>
-                            <m:e>
-                              <m:r>
-                                <a:rPr lang="en-US" i="1" sz="1800">
-                                  <a:solidFill>
-                                    <a:srgbClr val="111111"/>
-                                  </a:solidFill>
-                                  <a:latin typeface="Cambria Math"/>
-                                  <a:cs typeface="Cambria Math"/>
-                                </a:rPr>
-                                <m:t>p</m:t>
-                              </m:r>
-                            </m:e>
-                          </m:acc>
-                          <m:r>
-                            <m:rPr>
-                              <m:sty m:val="p"/>
-                            </m:rPr>
-                            <a:rPr lang="en-US" i="1" sz="1800">
-                              <a:solidFill>
-                                <a:srgbClr val="111111"/>
-                              </a:solidFill>
-                              <a:latin typeface="Cambria Math"/>
-                              <a:cs typeface="Cambria Math"/>
-                            </a:rPr>
-                            <m:t>≥</m:t>
-                          </m:r>
-                          <m:r>
-                            <a:rPr lang="en-US" i="1" sz="1800">
-                              <a:solidFill>
-                                <a:srgbClr val="111111"/>
-                              </a:solidFill>
-                              <a:latin typeface="Cambria Math"/>
-                              <a:cs typeface="Cambria Math"/>
-                            </a:rPr>
-                            <m:t>1</m:t>
-                          </m:r>
-                          <m:r>
-                            <m:rPr>
-                              <m:sty m:val="p"/>
-                            </m:rPr>
-                            <a:rPr lang="en-US" i="1" sz="1800">
-                              <a:solidFill>
-                                <a:srgbClr val="111111"/>
-                              </a:solidFill>
-                              <a:latin typeface="Cambria Math"/>
-                              <a:cs typeface="Cambria Math"/>
-                            </a:rPr>
-                            <m:t>−</m:t>
-                          </m:r>
-                          <m:r>
-                            <a:rPr lang="en-US" i="1" sz="1800">
-                              <a:solidFill>
-                                <a:srgbClr val="111111"/>
-                              </a:solidFill>
-                              <a:latin typeface="Cambria Math"/>
-                              <a:cs typeface="Cambria Math"/>
-                            </a:rPr>
-                            <m:t>ε</m:t>
-                          </m:r>
-                        </m:e>
-                      </m:d>
-                      <m:r>
-                        <m:rPr>
-                          <m:sty m:val="p"/>
-                        </m:rPr>
-                        <a:rPr lang="en-US" i="1" sz="1800">
-                          <a:solidFill>
-                            <a:srgbClr val="111111"/>
-                          </a:solidFill>
-                          <a:latin typeface="Cambria Math"/>
-                          <a:cs typeface="Cambria Math"/>
-                        </a:rPr>
-                        <m:t>≥</m:t>
-                      </m:r>
-                      <m:r>
-                        <a:rPr lang="en-US" i="1" sz="1800">
-                          <a:solidFill>
-                            <a:srgbClr val="111111"/>
-                          </a:solidFill>
-                          <a:latin typeface="Cambria Math"/>
-                          <a:cs typeface="Cambria Math"/>
-                        </a:rPr>
-                        <m:t>1</m:t>
-                      </m:r>
-                      <m:r>
-                        <m:rPr>
-                          <m:sty m:val="p"/>
-                        </m:rPr>
-                        <a:rPr lang="en-US" i="1" sz="1800">
-                          <a:solidFill>
-                            <a:srgbClr val="111111"/>
-                          </a:solidFill>
-                          <a:latin typeface="Cambria Math"/>
-                          <a:cs typeface="Cambria Math"/>
-                        </a:rPr>
-                        <m:t>−</m:t>
-                      </m:r>
-                      <m:r>
-                        <a:rPr lang="en-US" i="1" sz="1800">
-                          <a:solidFill>
-                            <a:srgbClr val="111111"/>
-                          </a:solidFill>
-                          <a:latin typeface="Cambria Math"/>
-                          <a:cs typeface="Cambria Math"/>
-                        </a:rPr>
-                        <m:t>ε</m:t>
-                      </m:r>
-                    </m:oMath>
-                  </m:oMathPara>
-                </a14:m>
-                <a:endParaRPr lang="en-US" sz="1800"/>
-              </a:p>
-            </p:txBody>
-          </p:sp>
-        </mc:Choice>
-        <mc:Fallback>
-          <p:sp>
-            <p:nvSpPr>
-              <p:cNvPr id="8" name="Equation: selective" descr="LaTeX: \Pr\left(\hat{k} = k \mid \hat{p} \geq 1-\varepsilon\right) = \mathbb{E}\left[\hat{p} \mid \hat{p} \geq 1-\varepsilon\right] \geq 1-\varepsilon"/>
-              <p:cNvSpPr txBox="1">
-                <a:spLocks noRot="1" noChangeAspect="1" noMove="1" noResize="1" noEditPoints="1" noAdjustHandles="1" noChangeArrowheads="1" noChangeShapeType="1" noTextEdit="1"/>
-              </p:cNvSpPr>
-              <p:nvPr/>
-            </p:nvSpPr>
-            <p:spPr>
-              <a:xfrm>
-                <a:off x="1750161" y="5230368"/>
-                <a:ext cx="4532376" cy="338328"/>
-              </a:xfrm>
-              <a:prstGeom prst="rect">
-                <a:avLst/>
-              </a:prstGeom>
-              <a:blipFill>
-                <a:blip r:embed="rId4"/>
-                <a:stretch>
-                  <a:fillRect/>
-                </a:stretch>
-              </a:blipFill>
-            </p:spPr>
-            <p:txBody>
-              <a:bodyPr/>
-              <a:lstStyle/>
-              <a:p>
-                <a:r>
-                  <a:rPr lang="en-US">
-                    <a:noFill/>
-                  </a:rPr>
-                  <a:t> </a:t>
-                </a:r>
-              </a:p>
-            </p:txBody>
-          </p:sp>
-        </mc:Fallback>
-      </mc:AlternateContent>
-      <p:sp>
-        <p:nvSpPr>
-          <p:cNvPr id="9" name="Text: guarantee"/>
+      <p:sp>
+        <p:nvSpPr>
+          <p:cNvPr id="7" name="Text: result"/>
           <p:cNvSpPr txBox="1"/>
           <p:nvPr/>
         </p:nvSpPr>
         <p:spPr>
           <a:xfrm>
-            <a:off x="7481934" y="5120640"/>
-            <a:ext cx="4418067" cy="1097280"/>
+            <a:off x="8276851" y="4846320"/>
+            <a:ext cx="3598047" cy="1280160"/>
           </a:xfrm>
           <a:prstGeom prst="rect">
             <a:avLst/>
@@ -5273,39 +3313,21 @@
                 </a:solidFill>
                 <a:latin typeface="Cambria"/>
               </a:rPr>
-              <a:t>Answer only when the posterior </a:t>
-            </a:r>
-            <a:r>
-              <a:rPr sz="1400" b="0" i="1">
-                <a:solidFill>
-                  <a:srgbClr val="111111"/>
-                </a:solidFill>
-                <a:latin typeface="Cambria"/>
-              </a:rPr>
-              <a:t>p̂</a:t>
-            </a:r>
-            <a:r>
-              <a:rPr sz="1400" b="0" i="0">
-                <a:solidFill>
-                  <a:srgbClr val="111111"/>
-                </a:solidFill>
-                <a:latin typeface="Cambria"/>
-              </a:rPr>
-              <a:t> reaches 0.99, and the name is right at least 99% of the times it is given, while the generator is the truth.</a:t>
-            </a:r>
-          </a:p>
-        </p:txBody>
-      </p:sp>
-      <p:sp>
-        <p:nvSpPr>
-          <p:cNvPr id="10" name="Text: citation"/>
+              <a:t>Named only at 99% confidence, it was right 99.7% or more of the time at every number of bodies in view, from 1 to 22, on synthetic columns.</a:t>
+            </a:r>
+          </a:p>
+        </p:txBody>
+      </p:sp>
+      <p:sp>
+        <p:nvSpPr>
+          <p:cNvPr id="8" name="Text: footer"/>
           <p:cNvSpPr txBox="1"/>
           <p:nvPr/>
         </p:nvSpPr>
         <p:spPr>
           <a:xfrm>
-            <a:off x="1750161" y="6327648"/>
-            <a:ext cx="8869604" cy="365760"/>
+            <a:off x="1750161" y="6272784"/>
+            <a:ext cx="9120631" cy="411480"/>
           </a:xfrm>
           <a:prstGeom prst="rect">
             <a:avLst/>
@@ -5324,27 +3346,43 @@
               </a:spcAft>
             </a:pPr>
             <a:r>
-              <a:rPr sz="900" b="0" i="0">
+              <a:rPr sz="1100" b="0" i="0">
                 <a:solidFill>
                   <a:srgbClr val="595959"/>
                 </a:solidFill>
                 <a:latin typeface="Cambria"/>
               </a:rPr>
-              <a:t>Synthetic columns drawn from Panjabi's published means and spreads (Spine 1991;16:861, 888; 1992;17:299); no patient data. Retrospective modelling, 2026.</a:t>
-            </a:r>
-          </a:p>
-        </p:txBody>
-      </p:sp>
-      <p:sp>
-        <p:nvSpPr>
-          <p:cNvPr id="11" name="Text: slide number"/>
+              <a:t>Synthetic columns from Panjabi's published tables (Spine 1991;16:861, 888; 1992;17:299); no patient data.</a:t>
+            </a:r>
+          </a:p>
+          <a:p>
+            <a:pPr algn="l">
+              <a:spcAft>
+                <a:spcPts val="0"/>
+              </a:spcAft>
+            </a:pPr>
+            <a:r>
+              <a:rPr sz="1100" b="1" i="0">
+                <a:solidFill>
+                  <a:srgbClr val="111111"/>
+                </a:solidFill>
+                <a:latin typeface="Cambria"/>
+              </a:rPr>
+              <a:t>Confidential: pre-filing draft, not for distribution</a:t>
+            </a:r>
+          </a:p>
+        </p:txBody>
+      </p:sp>
+      <p:sp>
+        <p:nvSpPr>
+          <p:cNvPr id="9" name="Text: slide number"/>
           <p:cNvSpPr txBox="1"/>
           <p:nvPr/>
         </p:nvSpPr>
         <p:spPr>
           <a:xfrm>
-            <a:off x="11063246" y="6327648"/>
-            <a:ext cx="836755" cy="365760"/>
+            <a:off x="11063246" y="6272784"/>
+            <a:ext cx="836755" cy="274320"/>
           </a:xfrm>
           <a:prstGeom prst="rect">
             <a:avLst/>
@@ -5363,7 +3401,7 @@
               </a:spcAft>
             </a:pPr>
             <a:r>
-              <a:rPr sz="900" b="0" i="0">
+              <a:rPr sz="1100" b="0" i="0">
                 <a:solidFill>
                   <a:srgbClr val="595959"/>
                 </a:solidFill>
@@ -5427,7 +3465,7 @@
       </p:sp>
       <p:pic>
         <p:nvPicPr>
-          <p:cNvPr id="3" name="Figure: exact_slide_claims" descr="What a field says for certain about its middle body: at each border, the share of fields whose middle body lies within two levels of it that say which side at probability 0.99, by bodies in view, both planes. 2000 synthetic columns."/>
+          <p:cNvPr id="3" name="Figure: exact_slide_claims" descr="What a field says for certain about its middle body: at each border, the share of fields whose middle body lies within two levels of it that say which side at 99% confidence, by bodies in view, both planes. 2,000 synthetic columns."/>
           <p:cNvPicPr>
             <a:picLocks noChangeAspect="1"/>
           </p:cNvPicPr>
@@ -5442,433 +3480,23 @@
         <p:spPr>
           <a:xfrm>
             <a:off x="1750161" y="1325880"/>
-            <a:ext cx="4560315" cy="4434802"/>
+            <a:ext cx="4562856" cy="4434840"/>
           </a:xfrm>
           <a:prstGeom prst="rect">
             <a:avLst/>
           </a:prstGeom>
         </p:spPr>
       </p:pic>
-      <mc:AlternateContent xmlns:mc="http://schemas.openxmlformats.org/markup-compatibility/2006">
-        <mc:Choice xmlns:a14="http://schemas.microsoft.com/office/drawing/2010/main" Requires="a14">
-          <p:sp>
-            <p:nvSpPr>
-              <p:cNvPr id="4" name="Equation: claim" descr="LaTeX: \Pr(\ell \geq c \mid x_{1:n}) = \sum_{j \geq c} p(\ell = j \mid x_{1:n}) \geq 0.99"/>
-              <p:cNvSpPr txBox="1"/>
-              <p:nvPr/>
-            </p:nvSpPr>
-            <p:spPr>
-              <a:xfrm>
-                <a:off x="6477828" y="1463040"/>
-                <a:ext cx="4123944" cy="560832"/>
-              </a:xfrm>
-              <a:prstGeom prst="rect">
-                <a:avLst/>
-              </a:prstGeom>
-              <a:noFill/>
-            </p:spPr>
-            <p:txBody>
-              <a:bodyPr wrap="none" lIns="0" tIns="0" rIns="0" bIns="0" anchor="ctr">
-                <a:noAutofit/>
-              </a:bodyPr>
-              <a:lstStyle/>
-              <a:p>
-                <a:pPr algn="l"/>
-                <a14:m>
-                  <m:oMathPara xmlns:m="http://schemas.openxmlformats.org/officeDocument/2006/math">
-                    <m:oMathParaPr>
-                      <m:jc m:val="left"/>
-                    </m:oMathParaPr>
-                    <m:oMath>
-                      <m:r>
-                        <m:rPr>
-                          <m:sty m:val="p"/>
-                        </m:rPr>
-                        <a:rPr lang="en-US" i="1" sz="1800">
-                          <a:solidFill>
-                            <a:srgbClr val="111111"/>
-                          </a:solidFill>
-                          <a:latin typeface="Cambria Math"/>
-                          <a:cs typeface="Cambria Math"/>
-                        </a:rPr>
-                        <m:t>Pr</m:t>
-                      </m:r>
-                      <m:d>
-                        <m:dPr>
-                          <m:begChr m:val="("/>
-                          <m:endChr m:val=")"/>
-                          <m:sepChr m:val=""/>
-                          <m:grow/>
-                        </m:dPr>
-                        <m:e>
-                          <m:r>
-                            <m:rPr>
-                              <m:sty m:val="p"/>
-                            </m:rPr>
-                            <a:rPr lang="en-US" i="1" sz="1800">
-                              <a:solidFill>
-                                <a:srgbClr val="111111"/>
-                              </a:solidFill>
-                              <a:latin typeface="Cambria Math"/>
-                              <a:cs typeface="Cambria Math"/>
-                            </a:rPr>
-                            <m:t>ℓ</m:t>
-                          </m:r>
-                          <m:r>
-                            <m:rPr>
-                              <m:sty m:val="p"/>
-                            </m:rPr>
-                            <a:rPr lang="en-US" i="1" sz="1800">
-                              <a:solidFill>
-                                <a:srgbClr val="111111"/>
-                              </a:solidFill>
-                              <a:latin typeface="Cambria Math"/>
-                              <a:cs typeface="Cambria Math"/>
-                            </a:rPr>
-                            <m:t>≥</m:t>
-                          </m:r>
-                          <m:r>
-                            <a:rPr lang="en-US" i="1" sz="1800">
-                              <a:solidFill>
-                                <a:srgbClr val="111111"/>
-                              </a:solidFill>
-                              <a:latin typeface="Cambria Math"/>
-                              <a:cs typeface="Cambria Math"/>
-                            </a:rPr>
-                            <m:t>c</m:t>
-                          </m:r>
-                          <m:r>
-                            <m:rPr>
-                              <m:sty m:val="p"/>
-                            </m:rPr>
-                            <a:rPr lang="en-US" i="1" sz="1800">
-                              <a:solidFill>
-                                <a:srgbClr val="111111"/>
-                              </a:solidFill>
-                              <a:latin typeface="Cambria Math"/>
-                              <a:cs typeface="Cambria Math"/>
-                            </a:rPr>
-                            <m:t>∣</m:t>
-                          </m:r>
-                          <m:sSub>
-                            <m:e>
-                              <m:r>
-                                <a:rPr lang="en-US" i="1" sz="1800">
-                                  <a:solidFill>
-                                    <a:srgbClr val="111111"/>
-                                  </a:solidFill>
-                                  <a:latin typeface="Cambria Math"/>
-                                  <a:cs typeface="Cambria Math"/>
-                                </a:rPr>
-                                <m:t>x</m:t>
-                              </m:r>
-                            </m:e>
-                            <m:sub>
-                              <m:r>
-                                <a:rPr lang="en-US" i="1" sz="1800">
-                                  <a:solidFill>
-                                    <a:srgbClr val="111111"/>
-                                  </a:solidFill>
-                                  <a:latin typeface="Cambria Math"/>
-                                  <a:cs typeface="Cambria Math"/>
-                                </a:rPr>
-                                <m:t>1</m:t>
-                              </m:r>
-                              <m:r>
-                                <m:rPr>
-                                  <m:sty m:val="p"/>
-                                </m:rPr>
-                                <a:rPr lang="en-US" i="1" sz="1800">
-                                  <a:solidFill>
-                                    <a:srgbClr val="111111"/>
-                                  </a:solidFill>
-                                  <a:latin typeface="Cambria Math"/>
-                                  <a:cs typeface="Cambria Math"/>
-                                </a:rPr>
-                                <m:t>:</m:t>
-                              </m:r>
-                              <m:r>
-                                <a:rPr lang="en-US" i="1" sz="1800">
-                                  <a:solidFill>
-                                    <a:srgbClr val="111111"/>
-                                  </a:solidFill>
-                                  <a:latin typeface="Cambria Math"/>
-                                  <a:cs typeface="Cambria Math"/>
-                                </a:rPr>
-                                <m:t>n</m:t>
-                              </m:r>
-                            </m:sub>
-                          </m:sSub>
-                        </m:e>
-                      </m:d>
-                      <m:r>
-                        <m:rPr>
-                          <m:sty m:val="p"/>
-                        </m:rPr>
-                        <a:rPr lang="en-US" i="1" sz="1800">
-                          <a:solidFill>
-                            <a:srgbClr val="111111"/>
-                          </a:solidFill>
-                          <a:latin typeface="Cambria Math"/>
-                          <a:cs typeface="Cambria Math"/>
-                        </a:rPr>
-                        <m:t>=</m:t>
-                      </m:r>
-                      <m:nary>
-                        <m:naryPr>
-                          <m:chr m:val="∑"/>
-                          <m:limLoc m:val="undOvr"/>
-                          <m:subHide m:val="off"/>
-                          <m:supHide m:val="on"/>
-                        </m:naryPr>
-                        <m:sub>
-                          <m:r>
-                            <a:rPr lang="en-US" i="1" sz="1800">
-                              <a:solidFill>
-                                <a:srgbClr val="111111"/>
-                              </a:solidFill>
-                              <a:latin typeface="Cambria Math"/>
-                              <a:cs typeface="Cambria Math"/>
-                            </a:rPr>
-                            <m:t>j</m:t>
-                          </m:r>
-                          <m:r>
-                            <m:rPr>
-                              <m:sty m:val="p"/>
-                            </m:rPr>
-                            <a:rPr lang="en-US" i="1" sz="1800">
-                              <a:solidFill>
-                                <a:srgbClr val="111111"/>
-                              </a:solidFill>
-                              <a:latin typeface="Cambria Math"/>
-                              <a:cs typeface="Cambria Math"/>
-                            </a:rPr>
-                            <m:t>≥</m:t>
-                          </m:r>
-                          <m:r>
-                            <a:rPr lang="en-US" i="1" sz="1800">
-                              <a:solidFill>
-                                <a:srgbClr val="111111"/>
-                              </a:solidFill>
-                              <a:latin typeface="Cambria Math"/>
-                              <a:cs typeface="Cambria Math"/>
-                            </a:rPr>
-                            <m:t>c</m:t>
-                          </m:r>
-                        </m:sub>
-                        <m:sup>
-                          <m:r>
-                            <a:rPr lang="en-US" i="1" sz="1800">
-                              <a:solidFill>
-                                <a:srgbClr val="111111"/>
-                              </a:solidFill>
-                              <a:latin typeface="Cambria Math"/>
-                              <a:cs typeface="Cambria Math"/>
-                            </a:rPr>
-                            <m:t>​</m:t>
-                          </m:r>
-                        </m:sup>
-                        <m:e>
-                          <m:r>
-                            <a:rPr lang="en-US" i="1" sz="1800">
-                              <a:solidFill>
-                                <a:srgbClr val="111111"/>
-                              </a:solidFill>
-                              <a:latin typeface="Cambria Math"/>
-                              <a:cs typeface="Cambria Math"/>
-                            </a:rPr>
-                            <m:t>p</m:t>
-                          </m:r>
-                        </m:e>
-                      </m:nary>
-                      <m:d>
-                        <m:dPr>
-                          <m:begChr m:val="("/>
-                          <m:endChr m:val=")"/>
-                          <m:sepChr m:val=""/>
-                          <m:grow/>
-                        </m:dPr>
-                        <m:e>
-                          <m:r>
-                            <m:rPr>
-                              <m:sty m:val="p"/>
-                            </m:rPr>
-                            <a:rPr lang="en-US" i="1" sz="1800">
-                              <a:solidFill>
-                                <a:srgbClr val="111111"/>
-                              </a:solidFill>
-                              <a:latin typeface="Cambria Math"/>
-                              <a:cs typeface="Cambria Math"/>
-                            </a:rPr>
-                            <m:t>ℓ</m:t>
-                          </m:r>
-                          <m:r>
-                            <m:rPr>
-                              <m:sty m:val="p"/>
-                            </m:rPr>
-                            <a:rPr lang="en-US" i="1" sz="1800">
-                              <a:solidFill>
-                                <a:srgbClr val="111111"/>
-                              </a:solidFill>
-                              <a:latin typeface="Cambria Math"/>
-                              <a:cs typeface="Cambria Math"/>
-                            </a:rPr>
-                            <m:t>=</m:t>
-                          </m:r>
-                          <m:r>
-                            <a:rPr lang="en-US" i="1" sz="1800">
-                              <a:solidFill>
-                                <a:srgbClr val="111111"/>
-                              </a:solidFill>
-                              <a:latin typeface="Cambria Math"/>
-                              <a:cs typeface="Cambria Math"/>
-                            </a:rPr>
-                            <m:t>j</m:t>
-                          </m:r>
-                          <m:r>
-                            <m:rPr>
-                              <m:sty m:val="p"/>
-                            </m:rPr>
-                            <a:rPr lang="en-US" i="1" sz="1800">
-                              <a:solidFill>
-                                <a:srgbClr val="111111"/>
-                              </a:solidFill>
-                              <a:latin typeface="Cambria Math"/>
-                              <a:cs typeface="Cambria Math"/>
-                            </a:rPr>
-                            <m:t>∣</m:t>
-                          </m:r>
-                          <m:sSub>
-                            <m:e>
-                              <m:r>
-                                <a:rPr lang="en-US" i="1" sz="1800">
-                                  <a:solidFill>
-                                    <a:srgbClr val="111111"/>
-                                  </a:solidFill>
-                                  <a:latin typeface="Cambria Math"/>
-                                  <a:cs typeface="Cambria Math"/>
-                                </a:rPr>
-                                <m:t>x</m:t>
-                              </m:r>
-                            </m:e>
-                            <m:sub>
-                              <m:r>
-                                <a:rPr lang="en-US" i="1" sz="1800">
-                                  <a:solidFill>
-                                    <a:srgbClr val="111111"/>
-                                  </a:solidFill>
-                                  <a:latin typeface="Cambria Math"/>
-                                  <a:cs typeface="Cambria Math"/>
-                                </a:rPr>
-                                <m:t>1</m:t>
-                              </m:r>
-                              <m:r>
-                                <m:rPr>
-                                  <m:sty m:val="p"/>
-                                </m:rPr>
-                                <a:rPr lang="en-US" i="1" sz="1800">
-                                  <a:solidFill>
-                                    <a:srgbClr val="111111"/>
-                                  </a:solidFill>
-                                  <a:latin typeface="Cambria Math"/>
-                                  <a:cs typeface="Cambria Math"/>
-                                </a:rPr>
-                                <m:t>:</m:t>
-                              </m:r>
-                              <m:r>
-                                <a:rPr lang="en-US" i="1" sz="1800">
-                                  <a:solidFill>
-                                    <a:srgbClr val="111111"/>
-                                  </a:solidFill>
-                                  <a:latin typeface="Cambria Math"/>
-                                  <a:cs typeface="Cambria Math"/>
-                                </a:rPr>
-                                <m:t>n</m:t>
-                              </m:r>
-                            </m:sub>
-                          </m:sSub>
-                        </m:e>
-                      </m:d>
-                      <m:r>
-                        <m:rPr>
-                          <m:sty m:val="p"/>
-                        </m:rPr>
-                        <a:rPr lang="en-US" i="1" sz="1800">
-                          <a:solidFill>
-                            <a:srgbClr val="111111"/>
-                          </a:solidFill>
-                          <a:latin typeface="Cambria Math"/>
-                          <a:cs typeface="Cambria Math"/>
-                        </a:rPr>
-                        <m:t>≥</m:t>
-                      </m:r>
-                      <m:r>
-                        <a:rPr lang="en-US" i="1" sz="1800">
-                          <a:solidFill>
-                            <a:srgbClr val="111111"/>
-                          </a:solidFill>
-                          <a:latin typeface="Cambria Math"/>
-                          <a:cs typeface="Cambria Math"/>
-                        </a:rPr>
-                        <m:t>0.99</m:t>
-                      </m:r>
-                    </m:oMath>
-                  </m:oMathPara>
-                </a14:m>
-                <a:endParaRPr lang="en-US" sz="1800"/>
-              </a:p>
-            </p:txBody>
-          </p:sp>
-        </mc:Choice>
-        <mc:Fallback>
-          <p:sp>
-            <p:nvSpPr>
-              <p:cNvPr id="4" name="Equation: claim" descr="LaTeX: \Pr(\ell \geq c \mid x_{1:n}) = \sum_{j \geq c} p(\ell = j \mid x_{1:n}) \geq 0.99"/>
-              <p:cNvSpPr txBox="1">
-                <a:spLocks noRot="1" noChangeAspect="1" noMove="1" noResize="1" noEditPoints="1" noAdjustHandles="1" noChangeArrowheads="1" noChangeShapeType="1" noTextEdit="1"/>
-              </p:cNvSpPr>
-              <p:nvPr/>
-            </p:nvSpPr>
-            <p:spPr>
-              <a:xfrm>
-                <a:off x="6477828" y="1463040"/>
-                <a:ext cx="4123944" cy="560832"/>
-              </a:xfrm>
-              <a:prstGeom prst="rect">
-                <a:avLst/>
-              </a:prstGeom>
-              <a:blipFill>
-                <a:blip r:embed="rId3"/>
-                <a:stretch>
-                  <a:fillRect/>
-                </a:stretch>
-              </a:blipFill>
-            </p:spPr>
-            <p:txBody>
-              <a:bodyPr/>
-              <a:lstStyle/>
-              <a:p>
-                <a:r>
-                  <a:rPr lang="en-US">
-                    <a:noFill/>
-                  </a:rPr>
-                  <a:t> </a:t>
-                </a:r>
-              </a:p>
-            </p:txBody>
-          </p:sp>
-        </mc:Fallback>
-      </mc:AlternateContent>
-      <p:sp>
-        <p:nvSpPr>
-          <p:cNvPr id="5" name="Text: claim rule"/>
+      <p:sp>
+        <p:nvSpPr>
+          <p:cNvPr id="4" name="Text: claim rule"/>
           <p:cNvSpPr txBox="1"/>
           <p:nvPr/>
         </p:nvSpPr>
         <p:spPr>
           <a:xfrm>
-            <a:off x="6477828" y="2057400"/>
-            <a:ext cx="5422173" cy="731520"/>
+            <a:off x="6477828" y="1417320"/>
+            <a:ext cx="5422173" cy="1280160"/>
           </a:xfrm>
           <a:prstGeom prst="rect">
             <a:avLst/>
@@ -5887,27 +3515,27 @@
               </a:spcAft>
             </a:pPr>
             <a:r>
-              <a:rPr sz="1400" b="0" i="0">
+              <a:rPr sz="1500" b="0" i="0">
                 <a:solidFill>
                   <a:srgbClr val="111111"/>
                 </a:solidFill>
                 <a:latin typeface="Cambria"/>
               </a:rPr>
-              <a:t>A border claim sums the same posterior, so a claim made at 0.99 is right at least 99% of the times it is made.</a:t>
-            </a:r>
-          </a:p>
-        </p:txBody>
-      </p:sp>
-      <p:sp>
-        <p:nvSpPr>
-          <p:cNvPr id="6" name="Text: stat C7/T1"/>
+              <a:t>Claims made at 99% confidence are right at least 99% of the time over all fields (T12/L1 from one body: 99.96%, 13 wrong of 30,943). The rates below are for bodies within two levels of a border, chosen by their true level, where a claim can fall short.</a:t>
+            </a:r>
+          </a:p>
+        </p:txBody>
+      </p:sp>
+      <p:sp>
+        <p:nvSpPr>
+          <p:cNvPr id="5" name="Text: stat C7/T1"/>
           <p:cNvSpPr txBox="1"/>
           <p:nvPr/>
         </p:nvSpPr>
         <p:spPr>
           <a:xfrm>
-            <a:off x="6477828" y="2926080"/>
-            <a:ext cx="2593940" cy="1371600"/>
+            <a:off x="6477828" y="2788920"/>
+            <a:ext cx="2593940" cy="1325880"/>
           </a:xfrm>
           <a:prstGeom prst="rect">
             <a:avLst/>
@@ -5954,21 +3582,21 @@
                 </a:solidFill>
                 <a:latin typeface="Cambria"/>
               </a:rPr>
-              <a:t>of single bodies within two levels of C7/T1 say which side; right 99.84% (7 wrong of 4,514)</a:t>
-            </a:r>
-          </a:p>
-        </p:txBody>
-      </p:sp>
-      <p:sp>
-        <p:nvSpPr>
-          <p:cNvPr id="7" name="Text: stat T12/L1"/>
+              <a:t>of single bodies within two levels of C7/T1 say which side; right 99.8% (7 wrong of 4,514)</a:t>
+            </a:r>
+          </a:p>
+        </p:txBody>
+      </p:sp>
+      <p:sp>
+        <p:nvSpPr>
+          <p:cNvPr id="6" name="Text: stat T12/L1"/>
           <p:cNvSpPr txBox="1"/>
           <p:nvPr/>
         </p:nvSpPr>
         <p:spPr>
           <a:xfrm>
-            <a:off x="9306060" y="2926080"/>
-            <a:ext cx="2593940" cy="1371600"/>
+            <a:off x="9306060" y="2788920"/>
+            <a:ext cx="2593940" cy="1325880"/>
           </a:xfrm>
           <a:prstGeom prst="rect">
             <a:avLst/>
@@ -5992,7 +3620,7 @@
             <a:r>
               <a:rPr sz="3600" b="1" i="0">
                 <a:solidFill>
-                  <a:srgbClr val="A4262C"/>
+                  <a:srgbClr val="1B4F8C"/>
                 </a:solidFill>
                 <a:latin typeface="Cambria"/>
               </a:rPr>
@@ -6015,21 +3643,30 @@
                 </a:solidFill>
                 <a:latin typeface="Cambria"/>
               </a:rPr>
-              <a:t>at T12/L1, right 97.9% (12 wrong of 568): not near-certain</a:t>
-            </a:r>
-          </a:p>
-        </p:txBody>
-      </p:sp>
-      <p:sp>
-        <p:nvSpPr>
-          <p:cNvPr id="8" name="Text: stat region"/>
+              <a:t>of single bodies within two levels of T12/L1 say which side; right </a:t>
+            </a:r>
+            <a:r>
+              <a:rPr sz="1400" b="1" i="0">
+                <a:solidFill>
+                  <a:srgbClr val="A4262C"/>
+                </a:solidFill>
+                <a:latin typeface="Cambria"/>
+              </a:rPr>
+              <a:t>97.9% (12 wrong of 568), short of 99%</a:t>
+            </a:r>
+          </a:p>
+        </p:txBody>
+      </p:sp>
+      <p:sp>
+        <p:nvSpPr>
+          <p:cNvPr id="7" name="Text: stat region"/>
           <p:cNvSpPr txBox="1"/>
           <p:nvPr/>
         </p:nvSpPr>
         <p:spPr>
           <a:xfrm>
-            <a:off x="6477828" y="4434840"/>
-            <a:ext cx="2593940" cy="1371600"/>
+            <a:off x="6477828" y="4206240"/>
+            <a:ext cx="2593940" cy="1325880"/>
           </a:xfrm>
           <a:prstGeom prst="rect">
             <a:avLst/>
@@ -6076,21 +3713,21 @@
                 </a:solidFill>
                 <a:latin typeface="Cambria"/>
               </a:rPr>
-              <a:t>of single bodies say their region; right 99.92% (21 wrong of 26,786), only 2 of them far from both junctions</a:t>
-            </a:r>
-          </a:p>
-        </p:txBody>
-      </p:sp>
-      <p:sp>
-        <p:nvSpPr>
-          <p:cNvPr id="9" name="Text: stat nine bodies"/>
+              <a:t>of single bodies say their region; right 99.9% (21 wrong of 26,786), only 2 of them far from both junctions</a:t>
+            </a:r>
+          </a:p>
+        </p:txBody>
+      </p:sp>
+      <p:sp>
+        <p:nvSpPr>
+          <p:cNvPr id="8" name="Text: stat nine bodies"/>
           <p:cNvSpPr txBox="1"/>
           <p:nvPr/>
         </p:nvSpPr>
         <p:spPr>
           <a:xfrm>
-            <a:off x="9306060" y="4434840"/>
-            <a:ext cx="2593940" cy="1371600"/>
+            <a:off x="9306060" y="4206240"/>
+            <a:ext cx="2593940" cy="1325880"/>
           </a:xfrm>
           <a:prstGeom prst="rect">
             <a:avLst/>
@@ -6137,21 +3774,21 @@
                 </a:solidFill>
                 <a:latin typeface="Cambria"/>
               </a:rPr>
-              <a:t>near T12/L1 say which side from nine bodies (1 wrong of 5,279)</a:t>
-            </a:r>
-          </a:p>
-        </p:txBody>
-      </p:sp>
-      <p:sp>
-        <p:nvSpPr>
-          <p:cNvPr id="10" name="Text: citation"/>
+              <a:t>of fields with middle body T11 to L1 say which side of T12/L1 from nine bodies (1 wrong of 5,279)</a:t>
+            </a:r>
+          </a:p>
+        </p:txBody>
+      </p:sp>
+      <p:sp>
+        <p:nvSpPr>
+          <p:cNvPr id="9" name="Text: footer"/>
           <p:cNvSpPr txBox="1"/>
           <p:nvPr/>
         </p:nvSpPr>
         <p:spPr>
           <a:xfrm>
-            <a:off x="1750161" y="6327648"/>
-            <a:ext cx="8869604" cy="365760"/>
+            <a:off x="1750161" y="6272784"/>
+            <a:ext cx="9120631" cy="411480"/>
           </a:xfrm>
           <a:prstGeom prst="rect">
             <a:avLst/>
@@ -6170,27 +3807,43 @@
               </a:spcAft>
             </a:pPr>
             <a:r>
-              <a:rPr sz="900" b="0" i="0">
+              <a:rPr sz="1100" b="0" i="0">
                 <a:solidFill>
                   <a:srgbClr val="595959"/>
                 </a:solidFill>
                 <a:latin typeface="Cambria"/>
               </a:rPr>
-              <a:t>Synthetic columns drawn from Panjabi's published means and spreads (Spine 1991;16:861, 888; 1992;17:299); no patient data. Retrospective modelling, 2026.</a:t>
-            </a:r>
-          </a:p>
-        </p:txBody>
-      </p:sp>
-      <p:sp>
-        <p:nvSpPr>
-          <p:cNvPr id="11" name="Text: slide number"/>
+              <a:t>Synthetic columns from Panjabi's published tables (Spine 1991;16:861, 888; 1992;17:299); no patient data.</a:t>
+            </a:r>
+          </a:p>
+          <a:p>
+            <a:pPr algn="l">
+              <a:spcAft>
+                <a:spcPts val="0"/>
+              </a:spcAft>
+            </a:pPr>
+            <a:r>
+              <a:rPr sz="1100" b="1" i="0">
+                <a:solidFill>
+                  <a:srgbClr val="111111"/>
+                </a:solidFill>
+                <a:latin typeface="Cambria"/>
+              </a:rPr>
+              <a:t>Confidential: pre-filing draft, not for distribution</a:t>
+            </a:r>
+          </a:p>
+        </p:txBody>
+      </p:sp>
+      <p:sp>
+        <p:nvSpPr>
+          <p:cNvPr id="10" name="Text: slide number"/>
           <p:cNvSpPr txBox="1"/>
           <p:nvPr/>
         </p:nvSpPr>
         <p:spPr>
           <a:xfrm>
-            <a:off x="11063246" y="6327648"/>
-            <a:ext cx="836755" cy="365760"/>
+            <a:off x="11063246" y="6272784"/>
+            <a:ext cx="836755" cy="274320"/>
           </a:xfrm>
           <a:prstGeom prst="rect">
             <a:avLst/>
@@ -6209,7 +3862,7 @@
               </a:spcAft>
             </a:pPr>
             <a:r>
-              <a:rPr sz="900" b="0" i="0">
+              <a:rPr sz="1100" b="0" i="0">
                 <a:solidFill>
                   <a:srgbClr val="595959"/>
                 </a:solidFill>
@@ -6273,7 +3926,7 @@
       </p:sp>
       <p:pic>
         <p:nvPicPr>
-          <p:cNvPr id="3" name="Figure: exact_slide_robust" descr="When the table or error model is wrong, three bodies, both planes: the name's precision at posterior 0.99 (A) and the share named (B), for the printed table and for spreads widened by the root of 13/12 with 2 mm error. Bars, two standard errors; dotted, 99 per cent."/>
+          <p:cNvPr id="3" name="Figure: exact_slide_robust" descr="When the anatomy table or the measurement error is wrong, three bodies, both planes: how often a name given at 99% confidence is right (A) and the share named (B), printed table and a corrected rule, on separate synthetic columns. Bars, two standard errors; dotted, 99 per cent."/>
           <p:cNvPicPr>
             <a:picLocks noChangeAspect="1"/>
           </p:cNvPicPr>
@@ -6288,7 +3941,7 @@
         <p:spPr>
           <a:xfrm>
             <a:off x="1750161" y="1371600"/>
-            <a:ext cx="6191988" cy="3347021"/>
+            <a:ext cx="6190488" cy="3346704"/>
           </a:xfrm>
           <a:prstGeom prst="rect">
             <a:avLst/>
@@ -6304,7 +3957,7 @@
         <p:spPr>
           <a:xfrm>
             <a:off x="8109500" y="1371600"/>
-            <a:ext cx="3790500" cy="1143000"/>
+            <a:ext cx="3790500" cy="1188720"/>
           </a:xfrm>
           <a:prstGeom prst="rect">
             <a:avLst/>
@@ -6351,7 +4004,7 @@
                 </a:solidFill>
                 <a:latin typeface="Cambria"/>
               </a:rPr>
-              <a:t>of names at 0.99 right when the rule's table is estimated from 12 spines, as Panjabi's tables are</a:t>
+              <a:t>of three-body names at 99% confidence right when the rule's table is estimated from 12 spines, as Panjabi's tables are</a:t>
             </a:r>
           </a:p>
         </p:txBody>
@@ -6364,8 +4017,8 @@
         </p:nvSpPr>
         <p:spPr>
           <a:xfrm>
-            <a:off x="8109500" y="2697480"/>
-            <a:ext cx="3790500" cy="1280160"/>
+            <a:off x="8109500" y="2651760"/>
+            <a:ext cx="3790500" cy="1463040"/>
           </a:xfrm>
           <a:prstGeom prst="rect">
             <a:avLst/>
@@ -6389,7 +4042,7 @@
             <a:r>
               <a:rPr sz="3600" b="1" i="0">
                 <a:solidFill>
-                  <a:srgbClr val="1B4F8C"/>
+                  <a:srgbClr val="111111"/>
                 </a:solidFill>
                 <a:latin typeface="Cambria"/>
               </a:rPr>
@@ -6412,450 +4065,21 @@
                 </a:solidFill>
                 <a:latin typeface="Cambria"/>
               </a:rPr>
-              <a:t>with spreads widened and 2 mm of error, but 5.5% of fields named, not 19.5%, and lumbar names right 96.7%</a:t>
-            </a:r>
-          </a:p>
-        </p:txBody>
-      </p:sp>
-      <mc:AlternateContent xmlns:mc="http://schemas.openxmlformats.org/markup-compatibility/2006">
-        <mc:Choice xmlns:a14="http://schemas.microsoft.com/office/drawing/2010/main" Requires="a14">
-          <p:sp>
-            <p:nvSpPr>
-              <p:cNvPr id="6" name="Equation: honest" descr="LaTeX: \tilde{\sigma}_{m,\ell} = \sigma_{m,\ell}\sqrt{1 + 1/12},\qquad \sigma_{\mathrm{error}} = 2\ \mathrm{mm}"/>
-              <p:cNvSpPr txBox="1"/>
-              <p:nvPr/>
-            </p:nvSpPr>
-            <p:spPr>
-              <a:xfrm>
-                <a:off x="8109500" y="4160520"/>
-                <a:ext cx="3688080" cy="344424"/>
-              </a:xfrm>
-              <a:prstGeom prst="rect">
-                <a:avLst/>
-              </a:prstGeom>
-              <a:noFill/>
-            </p:spPr>
-            <p:txBody>
-              <a:bodyPr wrap="none" lIns="0" tIns="0" rIns="0" bIns="0" anchor="ctr">
-                <a:noAutofit/>
-              </a:bodyPr>
-              <a:lstStyle/>
-              <a:p>
-                <a:pPr algn="l"/>
-                <a14:m>
-                  <m:oMathPara xmlns:m="http://schemas.openxmlformats.org/officeDocument/2006/math">
-                    <m:oMathParaPr>
-                      <m:jc m:val="left"/>
-                    </m:oMathParaPr>
-                    <m:oMath>
-                      <m:sSub>
-                        <m:e>
-                          <m:acc>
-                            <m:accPr>
-                              <m:chr m:val="̃"/>
-                            </m:accPr>
-                            <m:e>
-                              <m:r>
-                                <a:rPr lang="en-US" i="1" sz="1600">
-                                  <a:solidFill>
-                                    <a:srgbClr val="111111"/>
-                                  </a:solidFill>
-                                  <a:latin typeface="Cambria Math"/>
-                                  <a:cs typeface="Cambria Math"/>
-                                </a:rPr>
-                                <m:t>σ</m:t>
-                              </m:r>
-                            </m:e>
-                          </m:acc>
-                        </m:e>
-                        <m:sub>
-                          <m:r>
-                            <a:rPr lang="en-US" i="1" sz="1600">
-                              <a:solidFill>
-                                <a:srgbClr val="111111"/>
-                              </a:solidFill>
-                              <a:latin typeface="Cambria Math"/>
-                              <a:cs typeface="Cambria Math"/>
-                            </a:rPr>
-                            <m:t>m</m:t>
-                          </m:r>
-                          <m:r>
-                            <m:rPr>
-                              <m:sty m:val="p"/>
-                            </m:rPr>
-                            <a:rPr lang="en-US" i="1" sz="1600">
-                              <a:solidFill>
-                                <a:srgbClr val="111111"/>
-                              </a:solidFill>
-                              <a:latin typeface="Cambria Math"/>
-                              <a:cs typeface="Cambria Math"/>
-                            </a:rPr>
-                            <m:t>,</m:t>
-                          </m:r>
-                          <m:r>
-                            <m:rPr>
-                              <m:sty m:val="p"/>
-                            </m:rPr>
-                            <a:rPr lang="en-US" i="1" sz="1600">
-                              <a:solidFill>
-                                <a:srgbClr val="111111"/>
-                              </a:solidFill>
-                              <a:latin typeface="Cambria Math"/>
-                              <a:cs typeface="Cambria Math"/>
-                            </a:rPr>
-                            <m:t>ℓ</m:t>
-                          </m:r>
-                        </m:sub>
-                      </m:sSub>
-                      <m:r>
-                        <m:rPr>
-                          <m:sty m:val="p"/>
-                        </m:rPr>
-                        <a:rPr lang="en-US" i="1" sz="1600">
-                          <a:solidFill>
-                            <a:srgbClr val="111111"/>
-                          </a:solidFill>
-                          <a:latin typeface="Cambria Math"/>
-                          <a:cs typeface="Cambria Math"/>
-                        </a:rPr>
-                        <m:t>=</m:t>
-                      </m:r>
-                      <m:sSub>
-                        <m:e>
-                          <m:r>
-                            <a:rPr lang="en-US" i="1" sz="1600">
-                              <a:solidFill>
-                                <a:srgbClr val="111111"/>
-                              </a:solidFill>
-                              <a:latin typeface="Cambria Math"/>
-                              <a:cs typeface="Cambria Math"/>
-                            </a:rPr>
-                            <m:t>σ</m:t>
-                          </m:r>
-                        </m:e>
-                        <m:sub>
-                          <m:r>
-                            <a:rPr lang="en-US" i="1" sz="1600">
-                              <a:solidFill>
-                                <a:srgbClr val="111111"/>
-                              </a:solidFill>
-                              <a:latin typeface="Cambria Math"/>
-                              <a:cs typeface="Cambria Math"/>
-                            </a:rPr>
-                            <m:t>m</m:t>
-                          </m:r>
-                          <m:r>
-                            <m:rPr>
-                              <m:sty m:val="p"/>
-                            </m:rPr>
-                            <a:rPr lang="en-US" i="1" sz="1600">
-                              <a:solidFill>
-                                <a:srgbClr val="111111"/>
-                              </a:solidFill>
-                              <a:latin typeface="Cambria Math"/>
-                              <a:cs typeface="Cambria Math"/>
-                            </a:rPr>
-                            <m:t>,</m:t>
-                          </m:r>
-                          <m:r>
-                            <m:rPr>
-                              <m:sty m:val="p"/>
-                            </m:rPr>
-                            <a:rPr lang="en-US" i="1" sz="1600">
-                              <a:solidFill>
-                                <a:srgbClr val="111111"/>
-                              </a:solidFill>
-                              <a:latin typeface="Cambria Math"/>
-                              <a:cs typeface="Cambria Math"/>
-                            </a:rPr>
-                            <m:t>ℓ</m:t>
-                          </m:r>
-                        </m:sub>
-                      </m:sSub>
-                      <m:rad>
-                        <m:radPr>
-                          <m:degHide m:val="on"/>
-                        </m:radPr>
-                        <m:deg/>
-                        <m:e>
-                          <m:r>
-                            <a:rPr lang="en-US" i="1" sz="1600">
-                              <a:solidFill>
-                                <a:srgbClr val="111111"/>
-                              </a:solidFill>
-                              <a:latin typeface="Cambria Math"/>
-                              <a:cs typeface="Cambria Math"/>
-                            </a:rPr>
-                            <m:t>1</m:t>
-                          </m:r>
-                          <m:r>
-                            <m:rPr>
-                              <m:sty m:val="p"/>
-                            </m:rPr>
-                            <a:rPr lang="en-US" i="1" sz="1600">
-                              <a:solidFill>
-                                <a:srgbClr val="111111"/>
-                              </a:solidFill>
-                              <a:latin typeface="Cambria Math"/>
-                              <a:cs typeface="Cambria Math"/>
-                            </a:rPr>
-                            <m:t>+</m:t>
-                          </m:r>
-                          <m:r>
-                            <a:rPr lang="en-US" i="1" sz="1600">
-                              <a:solidFill>
-                                <a:srgbClr val="111111"/>
-                              </a:solidFill>
-                              <a:latin typeface="Cambria Math"/>
-                              <a:cs typeface="Cambria Math"/>
-                            </a:rPr>
-                            <m:t>1</m:t>
-                          </m:r>
-                          <m:r>
-                            <m:rPr>
-                              <m:sty m:val="p"/>
-                            </m:rPr>
-                            <a:rPr lang="en-US" i="1" sz="1600">
-                              <a:solidFill>
-                                <a:srgbClr val="111111"/>
-                              </a:solidFill>
-                              <a:latin typeface="Cambria Math"/>
-                              <a:cs typeface="Cambria Math"/>
-                            </a:rPr>
-                            <m:t>/</m:t>
-                          </m:r>
-                          <m:r>
-                            <a:rPr lang="en-US" i="1" sz="1600">
-                              <a:solidFill>
-                                <a:srgbClr val="111111"/>
-                              </a:solidFill>
-                              <a:latin typeface="Cambria Math"/>
-                              <a:cs typeface="Cambria Math"/>
-                            </a:rPr>
-                            <m:t>12</m:t>
-                          </m:r>
-                        </m:e>
-                      </m:rad>
-                      <m:r>
-                        <m:rPr>
-                          <m:sty m:val="p"/>
-                        </m:rPr>
-                        <a:rPr lang="en-US" i="1" sz="1600">
-                          <a:solidFill>
-                            <a:srgbClr val="111111"/>
-                          </a:solidFill>
-                          <a:latin typeface="Cambria Math"/>
-                          <a:cs typeface="Cambria Math"/>
-                        </a:rPr>
-                        <m:t>,</m:t>
-                      </m:r>
-                      <m:r>
-                        <a:rPr lang="en-US" i="1" sz="1600">
-                          <a:solidFill>
-                            <a:srgbClr val="111111"/>
-                          </a:solidFill>
-                          <a:latin typeface="Cambria Math"/>
-                          <a:cs typeface="Cambria Math"/>
-                        </a:rPr>
-                        <m:t>  </m:t>
-                      </m:r>
-                      <m:sSub>
-                        <m:e>
-                          <m:r>
-                            <a:rPr lang="en-US" i="1" sz="1600">
-                              <a:solidFill>
-                                <a:srgbClr val="111111"/>
-                              </a:solidFill>
-                              <a:latin typeface="Cambria Math"/>
-                              <a:cs typeface="Cambria Math"/>
-                            </a:rPr>
-                            <m:t>σ</m:t>
-                          </m:r>
-                        </m:e>
-                        <m:sub>
-                          <m:r>
-                            <m:rPr>
-                              <m:sty m:val="p"/>
-                            </m:rPr>
-                            <a:rPr lang="en-US" i="1" sz="1600">
-                              <a:solidFill>
-                                <a:srgbClr val="111111"/>
-                              </a:solidFill>
-                              <a:latin typeface="Cambria Math"/>
-                              <a:cs typeface="Cambria Math"/>
-                            </a:rPr>
-                            <m:t>e</m:t>
-                          </m:r>
-                          <m:r>
-                            <m:rPr>
-                              <m:sty m:val="p"/>
-                            </m:rPr>
-                            <a:rPr lang="en-US" i="1" sz="1600">
-                              <a:solidFill>
-                                <a:srgbClr val="111111"/>
-                              </a:solidFill>
-                              <a:latin typeface="Cambria Math"/>
-                              <a:cs typeface="Cambria Math"/>
-                            </a:rPr>
-                            <m:t>r</m:t>
-                          </m:r>
-                          <m:r>
-                            <m:rPr>
-                              <m:sty m:val="p"/>
-                            </m:rPr>
-                            <a:rPr lang="en-US" i="1" sz="1600">
-                              <a:solidFill>
-                                <a:srgbClr val="111111"/>
-                              </a:solidFill>
-                              <a:latin typeface="Cambria Math"/>
-                              <a:cs typeface="Cambria Math"/>
-                            </a:rPr>
-                            <m:t>r</m:t>
-                          </m:r>
-                          <m:r>
-                            <m:rPr>
-                              <m:sty m:val="p"/>
-                            </m:rPr>
-                            <a:rPr lang="en-US" i="1" sz="1600">
-                              <a:solidFill>
-                                <a:srgbClr val="111111"/>
-                              </a:solidFill>
-                              <a:latin typeface="Cambria Math"/>
-                              <a:cs typeface="Cambria Math"/>
-                            </a:rPr>
-                            <m:t>o</m:t>
-                          </m:r>
-                          <m:r>
-                            <m:rPr>
-                              <m:sty m:val="p"/>
-                            </m:rPr>
-                            <a:rPr lang="en-US" i="1" sz="1600">
-                              <a:solidFill>
-                                <a:srgbClr val="111111"/>
-                              </a:solidFill>
-                              <a:latin typeface="Cambria Math"/>
-                              <a:cs typeface="Cambria Math"/>
-                            </a:rPr>
-                            <m:t>r</m:t>
-                          </m:r>
-                        </m:sub>
-                      </m:sSub>
-                      <m:r>
-                        <m:rPr>
-                          <m:sty m:val="p"/>
-                        </m:rPr>
-                        <a:rPr lang="en-US" i="1" sz="1600">
-                          <a:solidFill>
-                            <a:srgbClr val="111111"/>
-                          </a:solidFill>
-                          <a:latin typeface="Cambria Math"/>
-                          <a:cs typeface="Cambria Math"/>
-                        </a:rPr>
-                        <m:t>=</m:t>
-                      </m:r>
-                      <m:r>
-                        <a:rPr lang="en-US" i="1" sz="1600">
-                          <a:solidFill>
-                            <a:srgbClr val="111111"/>
-                          </a:solidFill>
-                          <a:latin typeface="Cambria Math"/>
-                          <a:cs typeface="Cambria Math"/>
-                        </a:rPr>
-                        <m:t>2</m:t>
-                      </m:r>
-                      <m:r>
-                        <a:rPr lang="en-US" i="1" sz="1600">
-                          <a:solidFill>
-                            <a:srgbClr val="111111"/>
-                          </a:solidFill>
-                          <a:latin typeface="Cambria Math"/>
-                          <a:cs typeface="Cambria Math"/>
-                        </a:rPr>
-                        <m:t> </m:t>
-                      </m:r>
-                      <m:r>
-                        <m:rPr>
-                          <m:sty m:val="p"/>
-                        </m:rPr>
-                        <a:rPr lang="en-US" i="1" sz="1600">
-                          <a:solidFill>
-                            <a:srgbClr val="111111"/>
-                          </a:solidFill>
-                          <a:latin typeface="Cambria Math"/>
-                          <a:cs typeface="Cambria Math"/>
-                        </a:rPr>
-                        <m:t>m</m:t>
-                      </m:r>
-                      <m:r>
-                        <m:rPr>
-                          <m:sty m:val="p"/>
-                        </m:rPr>
-                        <a:rPr lang="en-US" i="1" sz="1600">
-                          <a:solidFill>
-                            <a:srgbClr val="111111"/>
-                          </a:solidFill>
-                          <a:latin typeface="Cambria Math"/>
-                          <a:cs typeface="Cambria Math"/>
-                        </a:rPr>
-                        <m:t>m</m:t>
-                      </m:r>
-                    </m:oMath>
-                  </m:oMathPara>
-                </a14:m>
-                <a:endParaRPr lang="en-US" sz="1600"/>
-              </a:p>
-            </p:txBody>
-          </p:sp>
-        </mc:Choice>
-        <mc:Fallback>
-          <p:sp>
-            <p:nvSpPr>
-              <p:cNvPr id="6" name="Equation: honest" descr="LaTeX: \tilde{\sigma}_{m,\ell} = \sigma_{m,\ell}\sqrt{1 + 1/12},\qquad \sigma_{\mathrm{error}} = 2\ \mathrm{mm}"/>
-              <p:cNvSpPr txBox="1">
-                <a:spLocks noRot="1" noChangeAspect="1" noMove="1" noResize="1" noEditPoints="1" noAdjustHandles="1" noChangeArrowheads="1" noChangeShapeType="1" noTextEdit="1"/>
-              </p:cNvSpPr>
-              <p:nvPr/>
-            </p:nvSpPr>
-            <p:spPr>
-              <a:xfrm>
-                <a:off x="8109500" y="4160520"/>
-                <a:ext cx="3688080" cy="344424"/>
-              </a:xfrm>
-              <a:prstGeom prst="rect">
-                <a:avLst/>
-              </a:prstGeom>
-              <a:blipFill>
-                <a:blip r:embed="rId3"/>
-                <a:stretch>
-                  <a:fillRect/>
-                </a:stretch>
-              </a:blipFill>
-            </p:spPr>
-            <p:txBody>
-              <a:bodyPr/>
-              <a:lstStyle/>
-              <a:p>
-                <a:r>
-                  <a:rPr lang="en-US">
-                    <a:noFill/>
-                  </a:rPr>
-                  <a:t> </a:t>
-                </a:r>
-              </a:p>
-            </p:txBody>
-          </p:sp>
-        </mc:Fallback>
-      </mc:AlternateContent>
-      <p:sp>
-        <p:nvSpPr>
-          <p:cNvPr id="7" name="Text: next"/>
+              <a:t>with a corrected rule, its one setting chosen on a separate pilot, but 5.5% of fields named, not 19.5%, and lumbar names right 96.7% (8 wrong of 246)</a:t>
+            </a:r>
+          </a:p>
+        </p:txBody>
+      </p:sp>
+      <p:sp>
+        <p:nvSpPr>
+          <p:cNvPr id="6" name="Text: next"/>
           <p:cNvSpPr txBox="1"/>
           <p:nvPr/>
         </p:nvSpPr>
         <p:spPr>
           <a:xfrm>
-            <a:off x="1750161" y="5138928"/>
-            <a:ext cx="10149840" cy="1097280"/>
+            <a:off x="1750161" y="5257800"/>
+            <a:ext cx="10149840" cy="822960"/>
           </a:xfrm>
           <a:prstGeom prst="rect">
             <a:avLst/>
@@ -6889,21 +4113,21 @@
                 </a:solidFill>
                 <a:latin typeface="Cambria"/>
               </a:rPr>
-              <a:t>measure the table on full-spine CTs counted from C2; carry a real series' prior over places; add the anomalous columns (four or six lumbar bodies, a thirteenth rib-bearing body) as places of their own.</a:t>
-            </a:r>
-          </a:p>
-        </p:txBody>
-      </p:sp>
-      <p:sp>
-        <p:nvSpPr>
-          <p:cNvPr id="8" name="Text: citation"/>
+              <a:t>test the rule on real full-spine CT.</a:t>
+            </a:r>
+          </a:p>
+        </p:txBody>
+      </p:sp>
+      <p:sp>
+        <p:nvSpPr>
+          <p:cNvPr id="7" name="Text: footer"/>
           <p:cNvSpPr txBox="1"/>
           <p:nvPr/>
         </p:nvSpPr>
         <p:spPr>
           <a:xfrm>
-            <a:off x="1750161" y="6327648"/>
-            <a:ext cx="8869604" cy="365760"/>
+            <a:off x="1750161" y="6272784"/>
+            <a:ext cx="9120631" cy="411480"/>
           </a:xfrm>
           <a:prstGeom prst="rect">
             <a:avLst/>
@@ -6922,27 +4146,43 @@
               </a:spcAft>
             </a:pPr>
             <a:r>
-              <a:rPr sz="900" b="0" i="0">
+              <a:rPr sz="1100" b="0" i="0">
                 <a:solidFill>
                   <a:srgbClr val="595959"/>
                 </a:solidFill>
                 <a:latin typeface="Cambria"/>
               </a:rPr>
-              <a:t>Synthetic columns drawn from Panjabi's published means and spreads (Spine 1991;16:861, 888; 1992;17:299); no patient data. Retrospective modelling, 2026.</a:t>
-            </a:r>
-          </a:p>
-        </p:txBody>
-      </p:sp>
-      <p:sp>
-        <p:nvSpPr>
-          <p:cNvPr id="9" name="Text: slide number"/>
+              <a:t>Synthetic columns from Panjabi's published tables (Spine 1991;16:861, 888; 1992;17:299); no patient data.</a:t>
+            </a:r>
+          </a:p>
+          <a:p>
+            <a:pPr algn="l">
+              <a:spcAft>
+                <a:spcPts val="0"/>
+              </a:spcAft>
+            </a:pPr>
+            <a:r>
+              <a:rPr sz="1100" b="1" i="0">
+                <a:solidFill>
+                  <a:srgbClr val="111111"/>
+                </a:solidFill>
+                <a:latin typeface="Cambria"/>
+              </a:rPr>
+              <a:t>Confidential: pre-filing draft, not for distribution</a:t>
+            </a:r>
+          </a:p>
+        </p:txBody>
+      </p:sp>
+      <p:sp>
+        <p:nvSpPr>
+          <p:cNvPr id="8" name="Text: slide number"/>
           <p:cNvSpPr txBox="1"/>
           <p:nvPr/>
         </p:nvSpPr>
         <p:spPr>
           <a:xfrm>
-            <a:off x="11063246" y="6327648"/>
-            <a:ext cx="836755" cy="365760"/>
+            <a:off x="11063246" y="6272784"/>
+            <a:ext cx="836755" cy="274320"/>
           </a:xfrm>
           <a:prstGeom prst="rect">
             <a:avLst/>
@@ -6961,7 +4201,7 @@
               </a:spcAft>
             </a:pPr>
             <a:r>
-              <a:rPr sz="900" b="0" i="0">
+              <a:rPr sz="1100" b="0" i="0">
                 <a:solidFill>
                   <a:srgbClr val="595959"/>
                 </a:solidFill>
